--- a/Opleverset_Project_5-6/Manage_&_Control/PO meeting 6.pptx
+++ b/Opleverset_Project_5-6/Manage_&_Control/PO meeting 6.pptx
@@ -12,8 +12,9 @@
     <p:sldId id="270" r:id="rId6"/>
     <p:sldId id="268" r:id="rId7"/>
     <p:sldId id="269" r:id="rId8"/>
-    <p:sldId id="261" r:id="rId9"/>
-    <p:sldId id="262" r:id="rId10"/>
+    <p:sldId id="271" r:id="rId9"/>
+    <p:sldId id="261" r:id="rId10"/>
+    <p:sldId id="262" r:id="rId11"/>
   </p:sldIdLst>
   <p:sldSz cx="12192000" cy="6858000"/>
   <p:notesSz cx="6858000" cy="9144000"/>
@@ -5868,6 +5869,69 @@
 </p:sld>
 </file>
 
+<file path=ppt/slides/slide10.xml><?xml version="1.0" encoding="utf-8"?>
+<p:sld xmlns:a="http://schemas.openxmlformats.org/drawingml/2006/main" xmlns:r="http://schemas.openxmlformats.org/officeDocument/2006/relationships" xmlns:p="http://schemas.openxmlformats.org/presentationml/2006/main">
+  <p:cSld>
+    <p:spTree>
+      <p:nvGrpSpPr>
+        <p:cNvPr id="1" name=""/>
+        <p:cNvGrpSpPr/>
+        <p:nvPr/>
+      </p:nvGrpSpPr>
+      <p:grpSpPr>
+        <a:xfrm>
+          <a:off x="0" y="0"/>
+          <a:ext cx="0" cy="0"/>
+          <a:chOff x="0" y="0"/>
+          <a:chExt cx="0" cy="0"/>
+        </a:xfrm>
+      </p:grpSpPr>
+      <p:sp>
+        <p:nvSpPr>
+          <p:cNvPr id="2" name="Title 1">
+            <a:extLst>
+              <a:ext uri="{FF2B5EF4-FFF2-40B4-BE49-F238E27FC236}">
+                <a16:creationId xmlns:a16="http://schemas.microsoft.com/office/drawing/2014/main" id="{FDB6D6B3-AE8C-AE86-F4D4-2E68C21B84A2}"/>
+              </a:ext>
+            </a:extLst>
+          </p:cNvPr>
+          <p:cNvSpPr>
+            <a:spLocks noGrp="1"/>
+          </p:cNvSpPr>
+          <p:nvPr>
+            <p:ph type="title"/>
+          </p:nvPr>
+        </p:nvSpPr>
+        <p:spPr>
+          <a:xfrm>
+            <a:off x="0" y="283029"/>
+            <a:ext cx="4484914" cy="1175658"/>
+          </a:xfrm>
+        </p:spPr>
+        <p:txBody>
+          <a:bodyPr/>
+          <a:lstStyle/>
+          <a:p>
+            <a:r>
+              <a:rPr lang="en-US" dirty="0"/>
+              <a:t>Retrospective</a:t>
+            </a:r>
+          </a:p>
+        </p:txBody>
+      </p:sp>
+    </p:spTree>
+    <p:extLst>
+      <p:ext uri="{BB962C8B-B14F-4D97-AF65-F5344CB8AC3E}">
+        <p14:creationId xmlns:p14="http://schemas.microsoft.com/office/powerpoint/2010/main" val="2783651172"/>
+      </p:ext>
+    </p:extLst>
+  </p:cSld>
+  <p:clrMapOvr>
+    <a:masterClrMapping/>
+  </p:clrMapOvr>
+</p:sld>
+</file>
+
 <file path=ppt/slides/slide2.xml><?xml version="1.0" encoding="utf-8"?>
 <p:sld xmlns:a="http://schemas.openxmlformats.org/drawingml/2006/main" xmlns:r="http://schemas.openxmlformats.org/officeDocument/2006/relationships" xmlns:p="http://schemas.openxmlformats.org/presentationml/2006/main">
   <p:cSld>
@@ -6110,6 +6174,17 @@
                 <a:schemeClr val="accent6"/>
               </a:solidFill>
             </a:endParaRPr>
+          </a:p>
+          <a:p>
+            <a:pPr lvl="1"/>
+            <a:r>
+              <a:rPr lang="en-US" sz="1600" dirty="0">
+                <a:solidFill>
+                  <a:schemeClr val="accent6"/>
+                </a:solidFill>
+              </a:rPr>
+              <a:t>Test-rapport</a:t>
+            </a:r>
           </a:p>
           <a:p>
             <a:pPr lvl="1"/>
@@ -7008,9 +7083,23 @@
 <file path=ppt/slides/slide8.xml><?xml version="1.0" encoding="utf-8"?>
 <p:sld xmlns:a="http://schemas.openxmlformats.org/drawingml/2006/main" xmlns:r="http://schemas.openxmlformats.org/officeDocument/2006/relationships" xmlns:p="http://schemas.openxmlformats.org/presentationml/2006/main">
   <p:cSld>
+    <p:bg>
+      <p:bgPr>
+        <a:solidFill>
+          <a:schemeClr val="bg1"/>
+        </a:solidFill>
+        <a:effectLst/>
+      </p:bgPr>
+    </p:bg>
     <p:spTree>
       <p:nvGrpSpPr>
-        <p:cNvPr id="1" name=""/>
+        <p:cNvPr id="1" name="">
+          <a:extLst>
+            <a:ext uri="{FF2B5EF4-FFF2-40B4-BE49-F238E27FC236}">
+              <a16:creationId xmlns:a16="http://schemas.microsoft.com/office/drawing/2014/main" id="{230BE565-4A59-8718-1570-E787C409B1B1}"/>
+            </a:ext>
+          </a:extLst>
+        </p:cNvPr>
         <p:cNvGrpSpPr/>
         <p:nvPr/>
       </p:nvGrpSpPr>
@@ -7022,12 +7111,117 @@
           <a:chExt cx="0" cy="0"/>
         </a:xfrm>
       </p:grpSpPr>
+      <p:sp useBgFill="1">
+        <p:nvSpPr>
+          <p:cNvPr id="19" name="Rectangle 18">
+            <a:extLst>
+              <a:ext uri="{FF2B5EF4-FFF2-40B4-BE49-F238E27FC236}">
+                <a16:creationId xmlns:a16="http://schemas.microsoft.com/office/drawing/2014/main" id="{32A27F81-FC5F-D89C-A085-871A4A2A0873}"/>
+              </a:ext>
+              <a:ext uri="{C183D7F6-B498-43B3-948B-1728B52AA6E4}">
+                <adec:decorative xmlns:adec="http://schemas.microsoft.com/office/drawing/2017/decorative" val="1"/>
+              </a:ext>
+            </a:extLst>
+          </p:cNvPr>
+          <p:cNvSpPr>
+            <a:spLocks noGrp="1" noRot="1" noChangeAspect="1" noMove="1" noResize="1" noEditPoints="1" noAdjustHandles="1" noChangeArrowheads="1" noChangeShapeType="1" noTextEdit="1"/>
+          </p:cNvSpPr>
+          <p:nvPr>
+            <p:extLst>
+              <p:ext uri="{386F3935-93C4-4BCD-93E2-E3B085C9AB24}">
+                <p16:designElem xmlns:p16="http://schemas.microsoft.com/office/powerpoint/2015/main" val="1"/>
+              </p:ext>
+            </p:extLst>
+          </p:nvPr>
+        </p:nvSpPr>
+        <p:spPr>
+          <a:xfrm>
+            <a:off x="0" y="0"/>
+            <a:ext cx="12192000" cy="6858000"/>
+          </a:xfrm>
+          <a:prstGeom prst="rect">
+            <a:avLst/>
+          </a:prstGeom>
+          <a:ln>
+            <a:noFill/>
+          </a:ln>
+        </p:spPr>
+        <p:style>
+          <a:lnRef idx="2">
+            <a:schemeClr val="accent1">
+              <a:shade val="50000"/>
+            </a:schemeClr>
+          </a:lnRef>
+          <a:fillRef idx="1">
+            <a:schemeClr val="accent1"/>
+          </a:fillRef>
+          <a:effectRef idx="0">
+            <a:schemeClr val="accent1"/>
+          </a:effectRef>
+          <a:fontRef idx="minor">
+            <a:schemeClr val="lt1"/>
+          </a:fontRef>
+        </p:style>
+        <p:txBody>
+          <a:bodyPr rtlCol="0" anchor="ctr"/>
+          <a:lstStyle/>
+          <a:p>
+            <a:pPr algn="ctr"/>
+            <a:endParaRPr lang="en-US"/>
+          </a:p>
+        </p:txBody>
+      </p:sp>
+      <p:pic>
+        <p:nvPicPr>
+          <p:cNvPr id="21" name="Picture 20">
+            <a:extLst>
+              <a:ext uri="{FF2B5EF4-FFF2-40B4-BE49-F238E27FC236}">
+                <a16:creationId xmlns:a16="http://schemas.microsoft.com/office/drawing/2014/main" id="{9B07995A-2ADC-74E4-961F-636453565E01}"/>
+              </a:ext>
+              <a:ext uri="{C183D7F6-B498-43B3-948B-1728B52AA6E4}">
+                <adec:decorative xmlns:adec="http://schemas.microsoft.com/office/drawing/2017/decorative" val="1"/>
+              </a:ext>
+            </a:extLst>
+          </p:cNvPr>
+          <p:cNvPicPr>
+            <a:picLocks noGrp="1" noRot="1" noChangeAspect="1" noMove="1" noResize="1" noEditPoints="1" noAdjustHandles="1" noChangeArrowheads="1" noChangeShapeType="1" noCrop="1"/>
+          </p:cNvPicPr>
+          <p:nvPr>
+            <p:extLst>
+              <p:ext uri="{386F3935-93C4-4BCD-93E2-E3B085C9AB24}">
+                <p16:designElem xmlns:p16="http://schemas.microsoft.com/office/powerpoint/2015/main" val="1"/>
+              </p:ext>
+            </p:extLst>
+          </p:nvPr>
+        </p:nvPicPr>
+        <p:blipFill>
+          <a:blip r:embed="rId2">
+            <a:extLst>
+              <a:ext uri="{28A0092B-C50C-407E-A947-70E740481C1C}">
+                <a14:useLocalDpi xmlns:a14="http://schemas.microsoft.com/office/drawing/2010/main" val="0"/>
+              </a:ext>
+            </a:extLst>
+          </a:blip>
+          <a:stretch>
+            <a:fillRect/>
+          </a:stretch>
+        </p:blipFill>
+        <p:spPr>
+          <a:xfrm>
+            <a:off x="0" y="0"/>
+            <a:ext cx="12192000" cy="1441450"/>
+          </a:xfrm>
+          <a:prstGeom prst="rect">
+            <a:avLst/>
+          </a:prstGeom>
+        </p:spPr>
+      </p:pic>
       <p:sp>
         <p:nvSpPr>
           <p:cNvPr id="2" name="Title 1">
             <a:extLst>
               <a:ext uri="{FF2B5EF4-FFF2-40B4-BE49-F238E27FC236}">
-                <a16:creationId xmlns:a16="http://schemas.microsoft.com/office/drawing/2014/main" id="{B773F3CC-6179-A794-5F67-87B448E20FFB}"/>
+                <a16:creationId xmlns:a16="http://schemas.microsoft.com/office/drawing/2014/main" id="{782C837B-31B8-6A17-500D-208CAFF68774}"/>
               </a:ext>
             </a:extLst>
           </p:cNvPr>
@@ -7040,25 +7234,41 @@
         </p:nvSpPr>
         <p:spPr>
           <a:xfrm>
-            <a:off x="119744" y="198315"/>
-            <a:ext cx="5279571" cy="1293028"/>
-          </a:xfrm>
-        </p:spPr>
-        <p:txBody>
-          <a:bodyPr/>
-          <a:lstStyle/>
-          <a:p>
-            <a:r>
-              <a:rPr lang="en-US" dirty="0"/>
-              <a:t>Sprint planning 6</a:t>
-            </a:r>
+            <a:off x="351263" y="216128"/>
+            <a:ext cx="4800601" cy="596590"/>
+          </a:xfrm>
+        </p:spPr>
+        <p:txBody>
+          <a:bodyPr anchor="b">
+            <a:normAutofit/>
+          </a:bodyPr>
+          <a:lstStyle/>
+          <a:p>
+            <a:pPr algn="l"/>
+            <a:r>
+              <a:rPr lang="en-US" sz="2400" dirty="0"/>
+              <a:t>Test rapport </a:t>
+            </a:r>
+            <a:r>
+              <a:rPr lang="en-US" sz="2400" dirty="0" err="1"/>
+              <a:t>ge</a:t>
+            </a:r>
+            <a:r>
+              <a:rPr lang="nl-NL" sz="2400" dirty="0"/>
+              <a:t>u</a:t>
+            </a:r>
+            <a:r>
+              <a:rPr lang="en-US" sz="2400" dirty="0" err="1"/>
+              <a:t>pdatet</a:t>
+            </a:r>
+            <a:endParaRPr lang="en-US" sz="2400" dirty="0"/>
           </a:p>
         </p:txBody>
       </p:sp>
     </p:spTree>
     <p:extLst>
       <p:ext uri="{BB962C8B-B14F-4D97-AF65-F5344CB8AC3E}">
-        <p14:creationId xmlns:p14="http://schemas.microsoft.com/office/powerpoint/2010/main" val="779869938"/>
+        <p14:creationId xmlns:p14="http://schemas.microsoft.com/office/powerpoint/2010/main" val="827783333"/>
       </p:ext>
     </p:extLst>
   </p:cSld>
@@ -7090,7 +7300,7 @@
           <p:cNvPr id="2" name="Title 1">
             <a:extLst>
               <a:ext uri="{FF2B5EF4-FFF2-40B4-BE49-F238E27FC236}">
-                <a16:creationId xmlns:a16="http://schemas.microsoft.com/office/drawing/2014/main" id="{FDB6D6B3-AE8C-AE86-F4D4-2E68C21B84A2}"/>
+                <a16:creationId xmlns:a16="http://schemas.microsoft.com/office/drawing/2014/main" id="{B773F3CC-6179-A794-5F67-87B448E20FFB}"/>
               </a:ext>
             </a:extLst>
           </p:cNvPr>
@@ -7103,8 +7313,8 @@
         </p:nvSpPr>
         <p:spPr>
           <a:xfrm>
-            <a:off x="0" y="283029"/>
-            <a:ext cx="4484914" cy="1175658"/>
+            <a:off x="119744" y="198315"/>
+            <a:ext cx="5279571" cy="1293028"/>
           </a:xfrm>
         </p:spPr>
         <p:txBody>
@@ -7113,7 +7323,7 @@
           <a:p>
             <a:r>
               <a:rPr lang="en-US" dirty="0"/>
-              <a:t>Retrospective</a:t>
+              <a:t>Sprint planning 6</a:t>
             </a:r>
           </a:p>
         </p:txBody>
@@ -7121,7 +7331,7 @@
     </p:spTree>
     <p:extLst>
       <p:ext uri="{BB962C8B-B14F-4D97-AF65-F5344CB8AC3E}">
-        <p14:creationId xmlns:p14="http://schemas.microsoft.com/office/powerpoint/2010/main" val="2783651172"/>
+        <p14:creationId xmlns:p14="http://schemas.microsoft.com/office/powerpoint/2010/main" val="779869938"/>
       </p:ext>
     </p:extLst>
   </p:cSld>

--- a/Opleverset_Project_5-6/Manage_&_Control/PO meeting 6.pptx
+++ b/Opleverset_Project_5-6/Manage_&_Control/PO meeting 6.pptx
@@ -7281,6 +7281,14 @@
 <file path=ppt/slides/slide9.xml><?xml version="1.0" encoding="utf-8"?>
 <p:sld xmlns:a="http://schemas.openxmlformats.org/drawingml/2006/main" xmlns:r="http://schemas.openxmlformats.org/officeDocument/2006/relationships" xmlns:p="http://schemas.openxmlformats.org/presentationml/2006/main">
   <p:cSld>
+    <p:bg>
+      <p:bgPr>
+        <a:solidFill>
+          <a:schemeClr val="bg1"/>
+        </a:solidFill>
+        <a:effectLst/>
+      </p:bgPr>
+    </p:bg>
     <p:spTree>
       <p:nvGrpSpPr>
         <p:cNvPr id="1" name=""/>
@@ -7295,6 +7303,96 @@
           <a:chExt cx="0" cy="0"/>
         </a:xfrm>
       </p:grpSpPr>
+      <p:pic>
+        <p:nvPicPr>
+          <p:cNvPr id="18" name="Picture 17">
+            <a:extLst>
+              <a:ext uri="{FF2B5EF4-FFF2-40B4-BE49-F238E27FC236}">
+                <a16:creationId xmlns:a16="http://schemas.microsoft.com/office/drawing/2014/main" id="{BDFADFB3-3D44-49A8-AE3B-A87C61607F7E}"/>
+              </a:ext>
+              <a:ext uri="{C183D7F6-B498-43B3-948B-1728B52AA6E4}">
+                <adec:decorative xmlns:adec="http://schemas.microsoft.com/office/drawing/2017/decorative" val="1"/>
+              </a:ext>
+            </a:extLst>
+          </p:cNvPr>
+          <p:cNvPicPr>
+            <a:picLocks noGrp="1" noRot="1" noChangeAspect="1" noMove="1" noResize="1" noEditPoints="1" noAdjustHandles="1" noChangeArrowheads="1" noChangeShapeType="1" noCrop="1"/>
+          </p:cNvPicPr>
+          <p:nvPr>
+            <p:extLst>
+              <p:ext uri="{386F3935-93C4-4BCD-93E2-E3B085C9AB24}">
+                <p16:designElem xmlns:p16="http://schemas.microsoft.com/office/powerpoint/2015/main" val="1"/>
+              </p:ext>
+            </p:extLst>
+          </p:nvPr>
+        </p:nvPicPr>
+        <p:blipFill>
+          <a:blip r:embed="rId2">
+            <a:extLst>
+              <a:ext uri="{28A0092B-C50C-407E-A947-70E740481C1C}">
+                <a14:useLocalDpi xmlns:a14="http://schemas.microsoft.com/office/drawing/2010/main" val="0"/>
+              </a:ext>
+            </a:extLst>
+          </a:blip>
+          <a:stretch>
+            <a:fillRect/>
+          </a:stretch>
+        </p:blipFill>
+        <p:spPr>
+          <a:xfrm>
+            <a:off x="0" y="0"/>
+            <a:ext cx="12192000" cy="1441450"/>
+          </a:xfrm>
+          <a:prstGeom prst="rect">
+            <a:avLst/>
+          </a:prstGeom>
+        </p:spPr>
+      </p:pic>
+      <p:pic>
+        <p:nvPicPr>
+          <p:cNvPr id="20" name="Picture 19">
+            <a:extLst>
+              <a:ext uri="{FF2B5EF4-FFF2-40B4-BE49-F238E27FC236}">
+                <a16:creationId xmlns:a16="http://schemas.microsoft.com/office/drawing/2014/main" id="{BB912AE0-CAD9-4F8F-A2A2-BDF07D4EDD22}"/>
+              </a:ext>
+              <a:ext uri="{C183D7F6-B498-43B3-948B-1728B52AA6E4}">
+                <adec:decorative xmlns:adec="http://schemas.microsoft.com/office/drawing/2017/decorative" val="1"/>
+              </a:ext>
+            </a:extLst>
+          </p:cNvPr>
+          <p:cNvPicPr>
+            <a:picLocks noGrp="1" noRot="1" noChangeAspect="1" noMove="1" noResize="1" noEditPoints="1" noAdjustHandles="1" noChangeArrowheads="1" noChangeShapeType="1" noCrop="1"/>
+          </p:cNvPicPr>
+          <p:nvPr>
+            <p:extLst>
+              <p:ext uri="{386F3935-93C4-4BCD-93E2-E3B085C9AB24}">
+                <p16:designElem xmlns:p16="http://schemas.microsoft.com/office/powerpoint/2015/main" val="1"/>
+              </p:ext>
+            </p:extLst>
+          </p:nvPr>
+        </p:nvPicPr>
+        <p:blipFill>
+          <a:blip r:embed="rId3">
+            <a:extLst>
+              <a:ext uri="{28A0092B-C50C-407E-A947-70E740481C1C}">
+                <a14:useLocalDpi xmlns:a14="http://schemas.microsoft.com/office/drawing/2010/main" val="0"/>
+              </a:ext>
+            </a:extLst>
+          </a:blip>
+          <a:stretch>
+            <a:fillRect/>
+          </a:stretch>
+        </p:blipFill>
+        <p:spPr>
+          <a:xfrm>
+            <a:off x="0" y="4375150"/>
+            <a:ext cx="12192000" cy="2482850"/>
+          </a:xfrm>
+          <a:prstGeom prst="rect">
+            <a:avLst/>
+          </a:prstGeom>
+        </p:spPr>
+      </p:pic>
       <p:sp>
         <p:nvSpPr>
           <p:cNvPr id="2" name="Title 1">
@@ -7313,21 +7411,117 @@
         </p:nvSpPr>
         <p:spPr>
           <a:xfrm>
-            <a:off x="119744" y="198315"/>
-            <a:ext cx="5279571" cy="1293028"/>
-          </a:xfrm>
-        </p:spPr>
-        <p:txBody>
-          <a:bodyPr/>
-          <a:lstStyle/>
-          <a:p>
-            <a:r>
-              <a:rPr lang="en-US" dirty="0"/>
+            <a:off x="685800" y="677194"/>
+            <a:ext cx="10820400" cy="909896"/>
+          </a:xfrm>
+        </p:spPr>
+        <p:txBody>
+          <a:bodyPr vert="horz" lIns="91440" tIns="45720" rIns="91440" bIns="45720" rtlCol="0" anchor="b">
+            <a:normAutofit/>
+          </a:bodyPr>
+          <a:lstStyle/>
+          <a:p>
+            <a:pPr algn="l"/>
+            <a:r>
+              <a:rPr lang="en-US" sz="4400"/>
               <a:t>Sprint planning 6</a:t>
             </a:r>
           </a:p>
         </p:txBody>
       </p:sp>
+      <p:sp>
+        <p:nvSpPr>
+          <p:cNvPr id="22" name="Rectangle 21">
+            <a:extLst>
+              <a:ext uri="{FF2B5EF4-FFF2-40B4-BE49-F238E27FC236}">
+                <a16:creationId xmlns:a16="http://schemas.microsoft.com/office/drawing/2014/main" id="{8A0AE57C-30AD-4D4E-9855-B5FBEAD6619D}"/>
+              </a:ext>
+              <a:ext uri="{C183D7F6-B498-43B3-948B-1728B52AA6E4}">
+                <adec:decorative xmlns:adec="http://schemas.microsoft.com/office/drawing/2017/decorative" val="1"/>
+              </a:ext>
+            </a:extLst>
+          </p:cNvPr>
+          <p:cNvSpPr>
+            <a:spLocks noGrp="1" noRot="1" noChangeAspect="1" noMove="1" noResize="1" noEditPoints="1" noAdjustHandles="1" noChangeArrowheads="1" noChangeShapeType="1" noTextEdit="1"/>
+          </p:cNvSpPr>
+          <p:nvPr>
+            <p:extLst>
+              <p:ext uri="{386F3935-93C4-4BCD-93E2-E3B085C9AB24}">
+                <p16:designElem xmlns:p16="http://schemas.microsoft.com/office/powerpoint/2015/main" val="1"/>
+              </p:ext>
+            </p:extLst>
+          </p:nvPr>
+        </p:nvSpPr>
+        <p:spPr bwMode="white">
+          <a:xfrm>
+            <a:off x="0" y="4360126"/>
+            <a:ext cx="12192000" cy="2497873"/>
+          </a:xfrm>
+          <a:prstGeom prst="rect">
+            <a:avLst/>
+          </a:prstGeom>
+          <a:solidFill>
+            <a:schemeClr val="bg1"/>
+          </a:solidFill>
+          <a:ln>
+            <a:noFill/>
+          </a:ln>
+        </p:spPr>
+        <p:style>
+          <a:lnRef idx="2">
+            <a:schemeClr val="accent1">
+              <a:shade val="50000"/>
+            </a:schemeClr>
+          </a:lnRef>
+          <a:fillRef idx="1">
+            <a:schemeClr val="accent1"/>
+          </a:fillRef>
+          <a:effectRef idx="0">
+            <a:schemeClr val="accent1"/>
+          </a:effectRef>
+          <a:fontRef idx="minor">
+            <a:schemeClr val="lt1"/>
+          </a:fontRef>
+        </p:style>
+        <p:txBody>
+          <a:bodyPr rtlCol="0" anchor="ctr"/>
+          <a:lstStyle/>
+          <a:p>
+            <a:pPr algn="ctr"/>
+            <a:endParaRPr lang="en-US"/>
+          </a:p>
+        </p:txBody>
+      </p:sp>
+      <p:pic>
+        <p:nvPicPr>
+          <p:cNvPr id="4" name="Picture 3">
+            <a:extLst>
+              <a:ext uri="{FF2B5EF4-FFF2-40B4-BE49-F238E27FC236}">
+                <a16:creationId xmlns:a16="http://schemas.microsoft.com/office/drawing/2014/main" id="{8E4B9057-2B0C-A8E8-FAA5-07E0AB4A5173}"/>
+              </a:ext>
+            </a:extLst>
+          </p:cNvPr>
+          <p:cNvPicPr>
+            <a:picLocks noChangeAspect="1"/>
+          </p:cNvPicPr>
+          <p:nvPr/>
+        </p:nvPicPr>
+        <p:blipFill>
+          <a:blip r:embed="rId4"/>
+          <a:stretch>
+            <a:fillRect/>
+          </a:stretch>
+        </p:blipFill>
+        <p:spPr>
+          <a:xfrm>
+            <a:off x="768626" y="2422498"/>
+            <a:ext cx="6320592" cy="3602736"/>
+          </a:xfrm>
+          <a:prstGeom prst="rect">
+            <a:avLst/>
+          </a:prstGeom>
+        </p:spPr>
+      </p:pic>
     </p:spTree>
     <p:extLst>
       <p:ext uri="{BB962C8B-B14F-4D97-AF65-F5344CB8AC3E}">

--- a/Opleverset_Project_5-6/Manage_&_Control/PO meeting 6.pptx
+++ b/Opleverset_Project_5-6/Manage_&_Control/PO meeting 6.pptx
@@ -4,17 +4,21 @@
   <p:sldMasterIdLst>
     <p:sldMasterId id="2147483660" r:id="rId1"/>
   </p:sldMasterIdLst>
+  <p:notesMasterIdLst>
+    <p:notesMasterId r:id="rId13"/>
+  </p:notesMasterIdLst>
   <p:sldIdLst>
     <p:sldId id="256" r:id="rId2"/>
     <p:sldId id="257" r:id="rId3"/>
     <p:sldId id="258" r:id="rId4"/>
     <p:sldId id="263" r:id="rId5"/>
-    <p:sldId id="270" r:id="rId6"/>
-    <p:sldId id="268" r:id="rId7"/>
-    <p:sldId id="269" r:id="rId8"/>
-    <p:sldId id="271" r:id="rId9"/>
-    <p:sldId id="261" r:id="rId10"/>
-    <p:sldId id="262" r:id="rId11"/>
+    <p:sldId id="272" r:id="rId6"/>
+    <p:sldId id="270" r:id="rId7"/>
+    <p:sldId id="268" r:id="rId8"/>
+    <p:sldId id="269" r:id="rId9"/>
+    <p:sldId id="271" r:id="rId10"/>
+    <p:sldId id="261" r:id="rId11"/>
+    <p:sldId id="262" r:id="rId12"/>
   </p:sldIdLst>
   <p:sldSz cx="12192000" cy="6858000"/>
   <p:notesSz cx="6858000" cy="9144000"/>
@@ -121,6 +125,439 @@
 </p:presentation>
 </file>
 
+<file path=ppt/notesMasters/notesMaster1.xml><?xml version="1.0" encoding="utf-8"?>
+<p:notesMaster xmlns:a="http://schemas.openxmlformats.org/drawingml/2006/main" xmlns:r="http://schemas.openxmlformats.org/officeDocument/2006/relationships" xmlns:p="http://schemas.openxmlformats.org/presentationml/2006/main">
+  <p:cSld>
+    <p:bg>
+      <p:bgRef idx="1001">
+        <a:schemeClr val="bg1"/>
+      </p:bgRef>
+    </p:bg>
+    <p:spTree>
+      <p:nvGrpSpPr>
+        <p:cNvPr id="1" name=""/>
+        <p:cNvGrpSpPr/>
+        <p:nvPr/>
+      </p:nvGrpSpPr>
+      <p:grpSpPr>
+        <a:xfrm>
+          <a:off x="0" y="0"/>
+          <a:ext cx="0" cy="0"/>
+          <a:chOff x="0" y="0"/>
+          <a:chExt cx="0" cy="0"/>
+        </a:xfrm>
+      </p:grpSpPr>
+      <p:sp>
+        <p:nvSpPr>
+          <p:cNvPr id="2" name="Header Placeholder 1"/>
+          <p:cNvSpPr>
+            <a:spLocks noGrp="1"/>
+          </p:cNvSpPr>
+          <p:nvPr>
+            <p:ph type="hdr" sz="quarter"/>
+          </p:nvPr>
+        </p:nvSpPr>
+        <p:spPr>
+          <a:xfrm>
+            <a:off x="0" y="0"/>
+            <a:ext cx="2971800" cy="458788"/>
+          </a:xfrm>
+          <a:prstGeom prst="rect">
+            <a:avLst/>
+          </a:prstGeom>
+        </p:spPr>
+        <p:txBody>
+          <a:bodyPr vert="horz" lIns="91440" tIns="45720" rIns="91440" bIns="45720" rtlCol="0"/>
+          <a:lstStyle>
+            <a:lvl1pPr algn="l">
+              <a:defRPr sz="1200"/>
+            </a:lvl1pPr>
+          </a:lstStyle>
+          <a:p>
+            <a:endParaRPr lang="en-US"/>
+          </a:p>
+        </p:txBody>
+      </p:sp>
+      <p:sp>
+        <p:nvSpPr>
+          <p:cNvPr id="3" name="Date Placeholder 2"/>
+          <p:cNvSpPr>
+            <a:spLocks noGrp="1"/>
+          </p:cNvSpPr>
+          <p:nvPr>
+            <p:ph type="dt" idx="1"/>
+          </p:nvPr>
+        </p:nvSpPr>
+        <p:spPr>
+          <a:xfrm>
+            <a:off x="3884613" y="0"/>
+            <a:ext cx="2971800" cy="458788"/>
+          </a:xfrm>
+          <a:prstGeom prst="rect">
+            <a:avLst/>
+          </a:prstGeom>
+        </p:spPr>
+        <p:txBody>
+          <a:bodyPr vert="horz" lIns="91440" tIns="45720" rIns="91440" bIns="45720" rtlCol="0"/>
+          <a:lstStyle>
+            <a:lvl1pPr algn="r">
+              <a:defRPr sz="1200"/>
+            </a:lvl1pPr>
+          </a:lstStyle>
+          <a:p>
+            <a:fld id="{7EEDA3F3-9868-8245-B3FF-65DDF84A9164}" type="datetimeFigureOut">
+              <a:rPr lang="en-US" smtClean="0"/>
+              <a:t>1/9/26</a:t>
+            </a:fld>
+            <a:endParaRPr lang="en-US"/>
+          </a:p>
+        </p:txBody>
+      </p:sp>
+      <p:sp>
+        <p:nvSpPr>
+          <p:cNvPr id="4" name="Slide Image Placeholder 3"/>
+          <p:cNvSpPr>
+            <a:spLocks noGrp="1" noRot="1" noChangeAspect="1"/>
+          </p:cNvSpPr>
+          <p:nvPr>
+            <p:ph type="sldImg" idx="2"/>
+          </p:nvPr>
+        </p:nvSpPr>
+        <p:spPr>
+          <a:xfrm>
+            <a:off x="685800" y="1143000"/>
+            <a:ext cx="5486400" cy="3086100"/>
+          </a:xfrm>
+          <a:prstGeom prst="rect">
+            <a:avLst/>
+          </a:prstGeom>
+          <a:noFill/>
+          <a:ln w="12700">
+            <a:solidFill>
+              <a:prstClr val="black"/>
+            </a:solidFill>
+          </a:ln>
+        </p:spPr>
+        <p:txBody>
+          <a:bodyPr vert="horz" lIns="91440" tIns="45720" rIns="91440" bIns="45720" rtlCol="0" anchor="ctr"/>
+          <a:lstStyle/>
+          <a:p>
+            <a:endParaRPr lang="en-US"/>
+          </a:p>
+        </p:txBody>
+      </p:sp>
+      <p:sp>
+        <p:nvSpPr>
+          <p:cNvPr id="5" name="Notes Placeholder 4"/>
+          <p:cNvSpPr>
+            <a:spLocks noGrp="1"/>
+          </p:cNvSpPr>
+          <p:nvPr>
+            <p:ph type="body" sz="quarter" idx="3"/>
+          </p:nvPr>
+        </p:nvSpPr>
+        <p:spPr>
+          <a:xfrm>
+            <a:off x="685800" y="4400550"/>
+            <a:ext cx="5486400" cy="3600450"/>
+          </a:xfrm>
+          <a:prstGeom prst="rect">
+            <a:avLst/>
+          </a:prstGeom>
+        </p:spPr>
+        <p:txBody>
+          <a:bodyPr vert="horz" lIns="91440" tIns="45720" rIns="91440" bIns="45720" rtlCol="0"/>
+          <a:lstStyle/>
+          <a:p>
+            <a:pPr lvl="0"/>
+            <a:r>
+              <a:rPr lang="en-US"/>
+              <a:t>Click to edit Master text styles</a:t>
+            </a:r>
+          </a:p>
+          <a:p>
+            <a:pPr lvl="1"/>
+            <a:r>
+              <a:rPr lang="en-US"/>
+              <a:t>Second level</a:t>
+            </a:r>
+          </a:p>
+          <a:p>
+            <a:pPr lvl="2"/>
+            <a:r>
+              <a:rPr lang="en-US"/>
+              <a:t>Third level</a:t>
+            </a:r>
+          </a:p>
+          <a:p>
+            <a:pPr lvl="3"/>
+            <a:r>
+              <a:rPr lang="en-US"/>
+              <a:t>Fourth level</a:t>
+            </a:r>
+          </a:p>
+          <a:p>
+            <a:pPr lvl="4"/>
+            <a:r>
+              <a:rPr lang="en-US"/>
+              <a:t>Fifth level</a:t>
+            </a:r>
+          </a:p>
+        </p:txBody>
+      </p:sp>
+      <p:sp>
+        <p:nvSpPr>
+          <p:cNvPr id="6" name="Footer Placeholder 5"/>
+          <p:cNvSpPr>
+            <a:spLocks noGrp="1"/>
+          </p:cNvSpPr>
+          <p:nvPr>
+            <p:ph type="ftr" sz="quarter" idx="4"/>
+          </p:nvPr>
+        </p:nvSpPr>
+        <p:spPr>
+          <a:xfrm>
+            <a:off x="0" y="8685213"/>
+            <a:ext cx="2971800" cy="458787"/>
+          </a:xfrm>
+          <a:prstGeom prst="rect">
+            <a:avLst/>
+          </a:prstGeom>
+        </p:spPr>
+        <p:txBody>
+          <a:bodyPr vert="horz" lIns="91440" tIns="45720" rIns="91440" bIns="45720" rtlCol="0" anchor="b"/>
+          <a:lstStyle>
+            <a:lvl1pPr algn="l">
+              <a:defRPr sz="1200"/>
+            </a:lvl1pPr>
+          </a:lstStyle>
+          <a:p>
+            <a:endParaRPr lang="en-US"/>
+          </a:p>
+        </p:txBody>
+      </p:sp>
+      <p:sp>
+        <p:nvSpPr>
+          <p:cNvPr id="7" name="Slide Number Placeholder 6"/>
+          <p:cNvSpPr>
+            <a:spLocks noGrp="1"/>
+          </p:cNvSpPr>
+          <p:nvPr>
+            <p:ph type="sldNum" sz="quarter" idx="5"/>
+          </p:nvPr>
+        </p:nvSpPr>
+        <p:spPr>
+          <a:xfrm>
+            <a:off x="3884613" y="8685213"/>
+            <a:ext cx="2971800" cy="458787"/>
+          </a:xfrm>
+          <a:prstGeom prst="rect">
+            <a:avLst/>
+          </a:prstGeom>
+        </p:spPr>
+        <p:txBody>
+          <a:bodyPr vert="horz" lIns="91440" tIns="45720" rIns="91440" bIns="45720" rtlCol="0" anchor="b"/>
+          <a:lstStyle>
+            <a:lvl1pPr algn="r">
+              <a:defRPr sz="1200"/>
+            </a:lvl1pPr>
+          </a:lstStyle>
+          <a:p>
+            <a:fld id="{9F8C1CD0-4888-0941-98BC-540E360D3A60}" type="slidenum">
+              <a:rPr lang="en-US" smtClean="0"/>
+              <a:t>‹#›</a:t>
+            </a:fld>
+            <a:endParaRPr lang="en-US"/>
+          </a:p>
+        </p:txBody>
+      </p:sp>
+    </p:spTree>
+    <p:extLst>
+      <p:ext uri="{BB962C8B-B14F-4D97-AF65-F5344CB8AC3E}">
+        <p14:creationId xmlns:p14="http://schemas.microsoft.com/office/powerpoint/2010/main" val="208435499"/>
+      </p:ext>
+    </p:extLst>
+  </p:cSld>
+  <p:clrMap bg1="lt1" tx1="dk1" bg2="lt2" tx2="dk2" accent1="accent1" accent2="accent2" accent3="accent3" accent4="accent4" accent5="accent5" accent6="accent6" hlink="hlink" folHlink="folHlink"/>
+  <p:notesStyle>
+    <a:lvl1pPr marL="0" algn="l" defTabSz="914400" rtl="0" eaLnBrk="1" latinLnBrk="0" hangingPunct="1">
+      <a:defRPr sz="1200" kern="1200">
+        <a:solidFill>
+          <a:schemeClr val="tx1"/>
+        </a:solidFill>
+        <a:latin typeface="+mn-lt"/>
+        <a:ea typeface="+mn-ea"/>
+        <a:cs typeface="+mn-cs"/>
+      </a:defRPr>
+    </a:lvl1pPr>
+    <a:lvl2pPr marL="457200" algn="l" defTabSz="914400" rtl="0" eaLnBrk="1" latinLnBrk="0" hangingPunct="1">
+      <a:defRPr sz="1200" kern="1200">
+        <a:solidFill>
+          <a:schemeClr val="tx1"/>
+        </a:solidFill>
+        <a:latin typeface="+mn-lt"/>
+        <a:ea typeface="+mn-ea"/>
+        <a:cs typeface="+mn-cs"/>
+      </a:defRPr>
+    </a:lvl2pPr>
+    <a:lvl3pPr marL="914400" algn="l" defTabSz="914400" rtl="0" eaLnBrk="1" latinLnBrk="0" hangingPunct="1">
+      <a:defRPr sz="1200" kern="1200">
+        <a:solidFill>
+          <a:schemeClr val="tx1"/>
+        </a:solidFill>
+        <a:latin typeface="+mn-lt"/>
+        <a:ea typeface="+mn-ea"/>
+        <a:cs typeface="+mn-cs"/>
+      </a:defRPr>
+    </a:lvl3pPr>
+    <a:lvl4pPr marL="1371600" algn="l" defTabSz="914400" rtl="0" eaLnBrk="1" latinLnBrk="0" hangingPunct="1">
+      <a:defRPr sz="1200" kern="1200">
+        <a:solidFill>
+          <a:schemeClr val="tx1"/>
+        </a:solidFill>
+        <a:latin typeface="+mn-lt"/>
+        <a:ea typeface="+mn-ea"/>
+        <a:cs typeface="+mn-cs"/>
+      </a:defRPr>
+    </a:lvl4pPr>
+    <a:lvl5pPr marL="1828800" algn="l" defTabSz="914400" rtl="0" eaLnBrk="1" latinLnBrk="0" hangingPunct="1">
+      <a:defRPr sz="1200" kern="1200">
+        <a:solidFill>
+          <a:schemeClr val="tx1"/>
+        </a:solidFill>
+        <a:latin typeface="+mn-lt"/>
+        <a:ea typeface="+mn-ea"/>
+        <a:cs typeface="+mn-cs"/>
+      </a:defRPr>
+    </a:lvl5pPr>
+    <a:lvl6pPr marL="2286000" algn="l" defTabSz="914400" rtl="0" eaLnBrk="1" latinLnBrk="0" hangingPunct="1">
+      <a:defRPr sz="1200" kern="1200">
+        <a:solidFill>
+          <a:schemeClr val="tx1"/>
+        </a:solidFill>
+        <a:latin typeface="+mn-lt"/>
+        <a:ea typeface="+mn-ea"/>
+        <a:cs typeface="+mn-cs"/>
+      </a:defRPr>
+    </a:lvl6pPr>
+    <a:lvl7pPr marL="2743200" algn="l" defTabSz="914400" rtl="0" eaLnBrk="1" latinLnBrk="0" hangingPunct="1">
+      <a:defRPr sz="1200" kern="1200">
+        <a:solidFill>
+          <a:schemeClr val="tx1"/>
+        </a:solidFill>
+        <a:latin typeface="+mn-lt"/>
+        <a:ea typeface="+mn-ea"/>
+        <a:cs typeface="+mn-cs"/>
+      </a:defRPr>
+    </a:lvl7pPr>
+    <a:lvl8pPr marL="3200400" algn="l" defTabSz="914400" rtl="0" eaLnBrk="1" latinLnBrk="0" hangingPunct="1">
+      <a:defRPr sz="1200" kern="1200">
+        <a:solidFill>
+          <a:schemeClr val="tx1"/>
+        </a:solidFill>
+        <a:latin typeface="+mn-lt"/>
+        <a:ea typeface="+mn-ea"/>
+        <a:cs typeface="+mn-cs"/>
+      </a:defRPr>
+    </a:lvl8pPr>
+    <a:lvl9pPr marL="3657600" algn="l" defTabSz="914400" rtl="0" eaLnBrk="1" latinLnBrk="0" hangingPunct="1">
+      <a:defRPr sz="1200" kern="1200">
+        <a:solidFill>
+          <a:schemeClr val="tx1"/>
+        </a:solidFill>
+        <a:latin typeface="+mn-lt"/>
+        <a:ea typeface="+mn-ea"/>
+        <a:cs typeface="+mn-cs"/>
+      </a:defRPr>
+    </a:lvl9pPr>
+  </p:notesStyle>
+</p:notesMaster>
+</file>
+
+<file path=ppt/notesSlides/notesSlide1.xml><?xml version="1.0" encoding="utf-8"?>
+<p:notes xmlns:a="http://schemas.openxmlformats.org/drawingml/2006/main" xmlns:r="http://schemas.openxmlformats.org/officeDocument/2006/relationships" xmlns:p="http://schemas.openxmlformats.org/presentationml/2006/main">
+  <p:cSld>
+    <p:spTree>
+      <p:nvGrpSpPr>
+        <p:cNvPr id="1" name=""/>
+        <p:cNvGrpSpPr/>
+        <p:nvPr/>
+      </p:nvGrpSpPr>
+      <p:grpSpPr>
+        <a:xfrm>
+          <a:off x="0" y="0"/>
+          <a:ext cx="0" cy="0"/>
+          <a:chOff x="0" y="0"/>
+          <a:chExt cx="0" cy="0"/>
+        </a:xfrm>
+      </p:grpSpPr>
+      <p:sp>
+        <p:nvSpPr>
+          <p:cNvPr id="2" name="Slide Image Placeholder 1"/>
+          <p:cNvSpPr>
+            <a:spLocks noGrp="1" noRot="1" noChangeAspect="1"/>
+          </p:cNvSpPr>
+          <p:nvPr>
+            <p:ph type="sldImg"/>
+          </p:nvPr>
+        </p:nvSpPr>
+        <p:spPr/>
+      </p:sp>
+      <p:sp>
+        <p:nvSpPr>
+          <p:cNvPr id="3" name="Notes Placeholder 2"/>
+          <p:cNvSpPr>
+            <a:spLocks noGrp="1"/>
+          </p:cNvSpPr>
+          <p:nvPr>
+            <p:ph type="body" idx="1"/>
+          </p:nvPr>
+        </p:nvSpPr>
+        <p:spPr/>
+        <p:txBody>
+          <a:bodyPr/>
+          <a:lstStyle/>
+          <a:p>
+            <a:endParaRPr lang="en-US" dirty="0"/>
+          </a:p>
+        </p:txBody>
+      </p:sp>
+      <p:sp>
+        <p:nvSpPr>
+          <p:cNvPr id="4" name="Slide Number Placeholder 3"/>
+          <p:cNvSpPr>
+            <a:spLocks noGrp="1"/>
+          </p:cNvSpPr>
+          <p:nvPr>
+            <p:ph type="sldNum" sz="quarter" idx="5"/>
+          </p:nvPr>
+        </p:nvSpPr>
+        <p:spPr/>
+        <p:txBody>
+          <a:bodyPr/>
+          <a:lstStyle/>
+          <a:p>
+            <a:fld id="{9F8C1CD0-4888-0941-98BC-540E360D3A60}" type="slidenum">
+              <a:rPr lang="en-US" smtClean="0"/>
+              <a:t>7</a:t>
+            </a:fld>
+            <a:endParaRPr lang="en-US"/>
+          </a:p>
+        </p:txBody>
+      </p:sp>
+    </p:spTree>
+    <p:extLst>
+      <p:ext uri="{BB962C8B-B14F-4D97-AF65-F5344CB8AC3E}">
+        <p14:creationId xmlns:p14="http://schemas.microsoft.com/office/powerpoint/2010/main" val="2337194158"/>
+      </p:ext>
+    </p:extLst>
+  </p:cSld>
+  <p:clrMapOvr>
+    <a:masterClrMapping/>
+  </p:clrMapOvr>
+</p:notes>
+</file>
+
 <file path=ppt/slideLayouts/slideLayout1.xml><?xml version="1.0" encoding="utf-8"?>
 <p:sldLayout xmlns:a="http://schemas.openxmlformats.org/drawingml/2006/main" xmlns:r="http://schemas.openxmlformats.org/officeDocument/2006/relationships" xmlns:p="http://schemas.openxmlformats.org/presentationml/2006/main" type="title" preserve="1">
   <p:cSld name="Title Slide">
@@ -291,7 +728,7 @@
           <a:p>
             <a:fld id="{A793CC80-0271-7245-85B8-CB73D7C6100F}" type="datetimeFigureOut">
               <a:rPr lang="en-US" smtClean="0"/>
-              <a:t>12/16/2025</a:t>
+              <a:t>1/9/26</a:t>
             </a:fld>
             <a:endParaRPr lang="en-US"/>
           </a:p>
@@ -558,7 +995,7 @@
           <a:p>
             <a:fld id="{A793CC80-0271-7245-85B8-CB73D7C6100F}" type="datetimeFigureOut">
               <a:rPr lang="en-US" smtClean="0"/>
-              <a:t>12/16/2025</a:t>
+              <a:t>1/9/26</a:t>
             </a:fld>
             <a:endParaRPr lang="en-US"/>
           </a:p>
@@ -789,7 +1226,7 @@
           <a:p>
             <a:fld id="{A793CC80-0271-7245-85B8-CB73D7C6100F}" type="datetimeFigureOut">
               <a:rPr lang="en-US" smtClean="0"/>
-              <a:t>12/16/2025</a:t>
+              <a:t>1/9/26</a:t>
             </a:fld>
             <a:endParaRPr lang="en-US"/>
           </a:p>
@@ -1099,7 +1536,7 @@
           <a:p>
             <a:fld id="{A793CC80-0271-7245-85B8-CB73D7C6100F}" type="datetimeFigureOut">
               <a:rPr lang="en-US" smtClean="0"/>
-              <a:t>12/16/2025</a:t>
+              <a:t>1/9/26</a:t>
             </a:fld>
             <a:endParaRPr lang="en-US"/>
           </a:p>
@@ -1572,7 +2009,7 @@
           <a:p>
             <a:fld id="{A793CC80-0271-7245-85B8-CB73D7C6100F}" type="datetimeFigureOut">
               <a:rPr lang="en-US" smtClean="0"/>
-              <a:t>12/16/2025</a:t>
+              <a:t>1/9/26</a:t>
             </a:fld>
             <a:endParaRPr lang="en-US"/>
           </a:p>
@@ -2119,7 +2556,7 @@
           <a:p>
             <a:fld id="{A793CC80-0271-7245-85B8-CB73D7C6100F}" type="datetimeFigureOut">
               <a:rPr lang="en-US" smtClean="0"/>
-              <a:t>12/16/2025</a:t>
+              <a:t>1/9/26</a:t>
             </a:fld>
             <a:endParaRPr lang="en-US"/>
           </a:p>
@@ -2893,7 +3330,7 @@
           <a:p>
             <a:fld id="{A793CC80-0271-7245-85B8-CB73D7C6100F}" type="datetimeFigureOut">
               <a:rPr lang="en-US" smtClean="0"/>
-              <a:t>12/16/2025</a:t>
+              <a:t>1/9/26</a:t>
             </a:fld>
             <a:endParaRPr lang="en-US"/>
           </a:p>
@@ -3068,7 +3505,7 @@
           <a:p>
             <a:fld id="{A793CC80-0271-7245-85B8-CB73D7C6100F}" type="datetimeFigureOut">
               <a:rPr lang="en-US" smtClean="0"/>
-              <a:t>12/16/2025</a:t>
+              <a:t>1/9/26</a:t>
             </a:fld>
             <a:endParaRPr lang="en-US"/>
           </a:p>
@@ -3291,7 +3728,7 @@
           <a:p>
             <a:fld id="{A793CC80-0271-7245-85B8-CB73D7C6100F}" type="datetimeFigureOut">
               <a:rPr lang="en-US" smtClean="0"/>
-              <a:t>12/16/2025</a:t>
+              <a:t>1/9/26</a:t>
             </a:fld>
             <a:endParaRPr lang="en-US"/>
           </a:p>
@@ -3471,7 +3908,7 @@
           <a:p>
             <a:fld id="{A793CC80-0271-7245-85B8-CB73D7C6100F}" type="datetimeFigureOut">
               <a:rPr lang="en-US" smtClean="0"/>
-              <a:t>12/16/2025</a:t>
+              <a:t>1/9/26</a:t>
             </a:fld>
             <a:endParaRPr lang="en-US"/>
           </a:p>
@@ -3760,7 +4197,7 @@
           <a:p>
             <a:fld id="{A793CC80-0271-7245-85B8-CB73D7C6100F}" type="datetimeFigureOut">
               <a:rPr lang="en-US" smtClean="0"/>
-              <a:t>12/16/2025</a:t>
+              <a:t>1/9/26</a:t>
             </a:fld>
             <a:endParaRPr lang="en-US"/>
           </a:p>
@@ -4002,7 +4439,7 @@
           <a:p>
             <a:fld id="{A793CC80-0271-7245-85B8-CB73D7C6100F}" type="datetimeFigureOut">
               <a:rPr lang="en-US" smtClean="0"/>
-              <a:t>12/16/2025</a:t>
+              <a:t>1/9/26</a:t>
             </a:fld>
             <a:endParaRPr lang="en-US"/>
           </a:p>
@@ -4381,7 +4818,7 @@
           <a:p>
             <a:fld id="{A793CC80-0271-7245-85B8-CB73D7C6100F}" type="datetimeFigureOut">
               <a:rPr lang="en-US" smtClean="0"/>
-              <a:t>12/16/2025</a:t>
+              <a:t>1/9/26</a:t>
             </a:fld>
             <a:endParaRPr lang="en-US"/>
           </a:p>
@@ -4499,7 +4936,7 @@
           <a:p>
             <a:fld id="{A793CC80-0271-7245-85B8-CB73D7C6100F}" type="datetimeFigureOut">
               <a:rPr lang="en-US" smtClean="0"/>
-              <a:t>12/16/2025</a:t>
+              <a:t>1/9/26</a:t>
             </a:fld>
             <a:endParaRPr lang="en-US"/>
           </a:p>
@@ -4594,7 +5031,7 @@
           <a:p>
             <a:fld id="{A793CC80-0271-7245-85B8-CB73D7C6100F}" type="datetimeFigureOut">
               <a:rPr lang="en-US" smtClean="0"/>
-              <a:t>12/16/2025</a:t>
+              <a:t>1/9/26</a:t>
             </a:fld>
             <a:endParaRPr lang="en-US"/>
           </a:p>
@@ -4843,7 +5280,7 @@
           <a:p>
             <a:fld id="{A793CC80-0271-7245-85B8-CB73D7C6100F}" type="datetimeFigureOut">
               <a:rPr lang="en-US" smtClean="0"/>
-              <a:t>12/16/2025</a:t>
+              <a:t>1/9/26</a:t>
             </a:fld>
             <a:endParaRPr lang="en-US"/>
           </a:p>
@@ -5100,7 +5537,7 @@
           <a:p>
             <a:fld id="{A793CC80-0271-7245-85B8-CB73D7C6100F}" type="datetimeFigureOut">
               <a:rPr lang="en-US" smtClean="0"/>
-              <a:t>12/16/2025</a:t>
+              <a:t>1/9/26</a:t>
             </a:fld>
             <a:endParaRPr lang="en-US"/>
           </a:p>
@@ -5343,7 +5780,7 @@
           <a:p>
             <a:fld id="{A793CC80-0271-7245-85B8-CB73D7C6100F}" type="datetimeFigureOut">
               <a:rPr lang="en-US" smtClean="0"/>
-              <a:t>12/16/2025</a:t>
+              <a:t>1/9/26</a:t>
             </a:fld>
             <a:endParaRPr lang="en-US"/>
           </a:p>
@@ -5891,6 +6328,99 @@
           <p:cNvPr id="2" name="Title 1">
             <a:extLst>
               <a:ext uri="{FF2B5EF4-FFF2-40B4-BE49-F238E27FC236}">
+                <a16:creationId xmlns:a16="http://schemas.microsoft.com/office/drawing/2014/main" id="{B773F3CC-6179-A794-5F67-87B448E20FFB}"/>
+              </a:ext>
+            </a:extLst>
+          </p:cNvPr>
+          <p:cNvSpPr>
+            <a:spLocks noGrp="1"/>
+          </p:cNvSpPr>
+          <p:nvPr>
+            <p:ph type="title"/>
+          </p:nvPr>
+        </p:nvSpPr>
+        <p:spPr>
+          <a:xfrm>
+            <a:off x="119744" y="198315"/>
+            <a:ext cx="5279571" cy="1293028"/>
+          </a:xfrm>
+        </p:spPr>
+        <p:txBody>
+          <a:bodyPr/>
+          <a:lstStyle/>
+          <a:p>
+            <a:r>
+              <a:rPr lang="en-US" dirty="0"/>
+              <a:t>Sprint planning 6</a:t>
+            </a:r>
+          </a:p>
+        </p:txBody>
+      </p:sp>
+      <p:pic>
+        <p:nvPicPr>
+          <p:cNvPr id="3" name="Picture 2">
+            <a:extLst>
+              <a:ext uri="{FF2B5EF4-FFF2-40B4-BE49-F238E27FC236}">
+                <a16:creationId xmlns:a16="http://schemas.microsoft.com/office/drawing/2014/main" id="{20CFAB96-2D9A-B39F-339B-3FCA77402BB3}"/>
+              </a:ext>
+            </a:extLst>
+          </p:cNvPr>
+          <p:cNvPicPr>
+            <a:picLocks noChangeAspect="1"/>
+          </p:cNvPicPr>
+          <p:nvPr/>
+        </p:nvPicPr>
+        <p:blipFill>
+          <a:blip r:embed="rId2"/>
+          <a:stretch>
+            <a:fillRect/>
+          </a:stretch>
+        </p:blipFill>
+        <p:spPr>
+          <a:xfrm>
+            <a:off x="1363654" y="1622186"/>
+            <a:ext cx="9464691" cy="4506470"/>
+          </a:xfrm>
+          <a:prstGeom prst="rect">
+            <a:avLst/>
+          </a:prstGeom>
+        </p:spPr>
+      </p:pic>
+    </p:spTree>
+    <p:extLst>
+      <p:ext uri="{BB962C8B-B14F-4D97-AF65-F5344CB8AC3E}">
+        <p14:creationId xmlns:p14="http://schemas.microsoft.com/office/powerpoint/2010/main" val="779869938"/>
+      </p:ext>
+    </p:extLst>
+  </p:cSld>
+  <p:clrMapOvr>
+    <a:masterClrMapping/>
+  </p:clrMapOvr>
+</p:sld>
+</file>
+
+<file path=ppt/slides/slide11.xml><?xml version="1.0" encoding="utf-8"?>
+<p:sld xmlns:a="http://schemas.openxmlformats.org/drawingml/2006/main" xmlns:r="http://schemas.openxmlformats.org/officeDocument/2006/relationships" xmlns:p="http://schemas.openxmlformats.org/presentationml/2006/main">
+  <p:cSld>
+    <p:spTree>
+      <p:nvGrpSpPr>
+        <p:cNvPr id="1" name=""/>
+        <p:cNvGrpSpPr/>
+        <p:nvPr/>
+      </p:nvGrpSpPr>
+      <p:grpSpPr>
+        <a:xfrm>
+          <a:off x="0" y="0"/>
+          <a:ext cx="0" cy="0"/>
+          <a:chOff x="0" y="0"/>
+          <a:chExt cx="0" cy="0"/>
+        </a:xfrm>
+      </p:grpSpPr>
+      <p:sp>
+        <p:nvSpPr>
+          <p:cNvPr id="2" name="Title 1">
+            <a:extLst>
+              <a:ext uri="{FF2B5EF4-FFF2-40B4-BE49-F238E27FC236}">
                 <a16:creationId xmlns:a16="http://schemas.microsoft.com/office/drawing/2014/main" id="{FDB6D6B3-AE8C-AE86-F4D4-2E68C21B84A2}"/>
               </a:ext>
             </a:extLst>
@@ -5916,6 +6446,155 @@
               <a:rPr lang="en-US" dirty="0"/>
               <a:t>Retrospective</a:t>
             </a:r>
+          </a:p>
+        </p:txBody>
+      </p:sp>
+      <p:sp>
+        <p:nvSpPr>
+          <p:cNvPr id="7" name="TextBox 6">
+            <a:extLst>
+              <a:ext uri="{FF2B5EF4-FFF2-40B4-BE49-F238E27FC236}">
+                <a16:creationId xmlns:a16="http://schemas.microsoft.com/office/drawing/2014/main" id="{B8D17877-38C8-BE0F-75B1-33BB261AF833}"/>
+              </a:ext>
+            </a:extLst>
+          </p:cNvPr>
+          <p:cNvSpPr txBox="1"/>
+          <p:nvPr/>
+        </p:nvSpPr>
+        <p:spPr>
+          <a:xfrm>
+            <a:off x="1012372" y="2120598"/>
+            <a:ext cx="6096000" cy="3139321"/>
+          </a:xfrm>
+          <a:prstGeom prst="rect">
+            <a:avLst/>
+          </a:prstGeom>
+          <a:noFill/>
+        </p:spPr>
+        <p:txBody>
+          <a:bodyPr wrap="square">
+            <a:spAutoFit/>
+          </a:bodyPr>
+          <a:lstStyle/>
+          <a:p>
+            <a:r>
+              <a:rPr lang="en-US" dirty="0" err="1"/>
+              <a:t>Goed</a:t>
+            </a:r>
+            <a:r>
+              <a:rPr lang="en-US" dirty="0"/>
+              <a:t>:</a:t>
+            </a:r>
+          </a:p>
+          <a:p>
+            <a:pPr lvl="1"/>
+            <a:r>
+              <a:rPr lang="en-US" dirty="0" err="1"/>
+              <a:t>Positieve</a:t>
+            </a:r>
+            <a:r>
+              <a:rPr lang="en-US" dirty="0"/>
+              <a:t> </a:t>
+            </a:r>
+            <a:r>
+              <a:rPr lang="en-US" dirty="0" err="1"/>
+              <a:t>inzet</a:t>
+            </a:r>
+            <a:endParaRPr lang="en-US" dirty="0"/>
+          </a:p>
+          <a:p>
+            <a:pPr lvl="1"/>
+            <a:endParaRPr lang="en-US" dirty="0"/>
+          </a:p>
+          <a:p>
+            <a:r>
+              <a:rPr lang="en-US" dirty="0"/>
+              <a:t>Fout:</a:t>
+            </a:r>
+          </a:p>
+          <a:p>
+            <a:pPr lvl="1"/>
+            <a:r>
+              <a:rPr lang="en-US" dirty="0" err="1"/>
+              <a:t>Niet</a:t>
+            </a:r>
+            <a:r>
+              <a:rPr lang="en-US" dirty="0"/>
+              <a:t> alle taken </a:t>
+            </a:r>
+            <a:r>
+              <a:rPr lang="en-US" dirty="0" err="1"/>
+              <a:t>compleet</a:t>
+            </a:r>
+            <a:endParaRPr lang="en-US" dirty="0"/>
+          </a:p>
+          <a:p>
+            <a:pPr lvl="1"/>
+            <a:endParaRPr lang="en-US" dirty="0"/>
+          </a:p>
+          <a:p>
+            <a:r>
+              <a:rPr lang="en-US" dirty="0"/>
+              <a:t>Kan </a:t>
+            </a:r>
+            <a:r>
+              <a:rPr lang="en-US" dirty="0" err="1"/>
+              <a:t>beter</a:t>
+            </a:r>
+            <a:r>
+              <a:rPr lang="en-US" dirty="0"/>
+              <a:t>:</a:t>
+            </a:r>
+          </a:p>
+          <a:p>
+            <a:pPr lvl="1"/>
+            <a:r>
+              <a:rPr lang="en-US" dirty="0" err="1"/>
+              <a:t>Proactiver</a:t>
+            </a:r>
+            <a:r>
+              <a:rPr lang="en-US" dirty="0"/>
+              <a:t> </a:t>
+            </a:r>
+            <a:r>
+              <a:rPr lang="en-US" dirty="0" err="1"/>
+              <a:t>werken</a:t>
+            </a:r>
+            <a:endParaRPr lang="en-US" dirty="0"/>
+          </a:p>
+          <a:p>
+            <a:pPr lvl="1"/>
+            <a:endParaRPr lang="en-US" dirty="0"/>
+          </a:p>
+          <a:p>
+            <a:r>
+              <a:rPr lang="en-US" dirty="0"/>
+              <a:t>Hoe:</a:t>
+            </a:r>
+          </a:p>
+          <a:p>
+            <a:pPr lvl="1"/>
+            <a:r>
+              <a:rPr lang="en-US" dirty="0" err="1"/>
+              <a:t>Acties</a:t>
+            </a:r>
+            <a:r>
+              <a:rPr lang="en-US" dirty="0"/>
+              <a:t> </a:t>
+            </a:r>
+            <a:r>
+              <a:rPr lang="en-US" dirty="0" err="1"/>
+              <a:t>concreet</a:t>
+            </a:r>
+            <a:r>
+              <a:rPr lang="en-US" dirty="0"/>
+              <a:t> </a:t>
+            </a:r>
+            <a:r>
+              <a:rPr lang="en-US" dirty="0" err="1"/>
+              <a:t>maken</a:t>
+            </a:r>
+            <a:endParaRPr lang="en-US" dirty="0"/>
           </a:p>
         </p:txBody>
       </p:sp>
@@ -6047,7 +6726,63 @@
                   <a:schemeClr val="accent6"/>
                 </a:solidFill>
               </a:rPr>
-              <a:t>Bedrijf</a:t>
+              <a:t>Bedrijfsbezoek</a:t>
+            </a:r>
+            <a:endParaRPr lang="en-US" sz="1600" dirty="0">
+              <a:solidFill>
+                <a:schemeClr val="accent6"/>
+              </a:solidFill>
+            </a:endParaRPr>
+          </a:p>
+          <a:p>
+            <a:pPr lvl="1"/>
+            <a:r>
+              <a:rPr lang="en-US" sz="1600" dirty="0" err="1">
+                <a:solidFill>
+                  <a:schemeClr val="accent6"/>
+                </a:solidFill>
+              </a:rPr>
+              <a:t>Kalibratie</a:t>
+            </a:r>
+            <a:r>
+              <a:rPr lang="en-US" sz="1600" dirty="0">
+                <a:solidFill>
+                  <a:schemeClr val="accent6"/>
+                </a:solidFill>
+              </a:rPr>
+              <a:t>/</a:t>
+            </a:r>
+            <a:r>
+              <a:rPr lang="en-US" sz="1600" dirty="0" err="1">
+                <a:solidFill>
+                  <a:schemeClr val="accent6"/>
+                </a:solidFill>
+              </a:rPr>
+              <a:t>afstandsbepaling</a:t>
+            </a:r>
+            <a:endParaRPr lang="en-US" sz="1600" dirty="0">
+              <a:solidFill>
+                <a:schemeClr val="accent6"/>
+              </a:solidFill>
+            </a:endParaRPr>
+          </a:p>
+          <a:p>
+            <a:pPr lvl="1"/>
+            <a:r>
+              <a:rPr lang="en-US" sz="1600" dirty="0">
+                <a:solidFill>
+                  <a:schemeClr val="accent6"/>
+                </a:solidFill>
+              </a:rPr>
+              <a:t>Stereo-</a:t>
+            </a:r>
+            <a:r>
+              <a:rPr lang="en-US" sz="1600" dirty="0" err="1">
+                <a:solidFill>
+                  <a:schemeClr val="accent6"/>
+                </a:solidFill>
+              </a:rPr>
+              <a:t>visie</a:t>
             </a:r>
             <a:r>
               <a:rPr lang="en-US" sz="1600" dirty="0">
@@ -6063,7 +6798,7 @@
                   <a:schemeClr val="accent6"/>
                 </a:solidFill>
               </a:rPr>
-              <a:t>bezoek</a:t>
+              <a:t>verslag</a:t>
             </a:r>
             <a:endParaRPr lang="en-US" sz="1600" dirty="0">
               <a:solidFill>
@@ -6074,128 +6809,26 @@
           <a:p>
             <a:pPr lvl="1"/>
             <a:r>
+              <a:rPr lang="en-US" sz="1600" dirty="0">
+                <a:solidFill>
+                  <a:schemeClr val="accent6"/>
+                </a:solidFill>
+              </a:rPr>
+              <a:t>2D </a:t>
+            </a:r>
+            <a:r>
               <a:rPr lang="en-US" sz="1600" dirty="0" err="1">
                 <a:solidFill>
                   <a:schemeClr val="accent6"/>
                 </a:solidFill>
               </a:rPr>
-              <a:t>Kalibreren</a:t>
+              <a:t>grafiek</a:t>
             </a:r>
             <a:endParaRPr lang="en-US" sz="1600" dirty="0">
               <a:solidFill>
                 <a:schemeClr val="accent6"/>
               </a:solidFill>
             </a:endParaRPr>
-          </a:p>
-          <a:p>
-            <a:pPr lvl="1"/>
-            <a:r>
-              <a:rPr lang="en-US" sz="1600" dirty="0" err="1">
-                <a:solidFill>
-                  <a:schemeClr val="accent6"/>
-                </a:solidFill>
-              </a:rPr>
-              <a:t>Detectie</a:t>
-            </a:r>
-            <a:r>
-              <a:rPr lang="en-US" sz="1600" dirty="0">
-                <a:solidFill>
-                  <a:schemeClr val="accent6"/>
-                </a:solidFill>
-              </a:rPr>
-              <a:t> </a:t>
-            </a:r>
-            <a:r>
-              <a:rPr lang="en-US" sz="1600" dirty="0" err="1">
-                <a:solidFill>
-                  <a:schemeClr val="accent6"/>
-                </a:solidFill>
-              </a:rPr>
-              <a:t>en</a:t>
-            </a:r>
-            <a:r>
-              <a:rPr lang="en-US" sz="1600" dirty="0">
-                <a:solidFill>
-                  <a:schemeClr val="accent6"/>
-                </a:solidFill>
-              </a:rPr>
-              <a:t> </a:t>
-            </a:r>
-            <a:r>
-              <a:rPr lang="en-US" sz="1600" dirty="0" err="1">
-                <a:solidFill>
-                  <a:schemeClr val="accent6"/>
-                </a:solidFill>
-              </a:rPr>
-              <a:t>afstand</a:t>
-            </a:r>
-            <a:endParaRPr lang="en-US" sz="1600" dirty="0">
-              <a:solidFill>
-                <a:schemeClr val="accent6"/>
-              </a:solidFill>
-            </a:endParaRPr>
-          </a:p>
-          <a:p>
-            <a:pPr lvl="1"/>
-            <a:r>
-              <a:rPr lang="en-US" sz="1600" dirty="0">
-                <a:solidFill>
-                  <a:schemeClr val="accent6"/>
-                </a:solidFill>
-              </a:rPr>
-              <a:t>Stereo-</a:t>
-            </a:r>
-            <a:r>
-              <a:rPr lang="en-US" sz="1600" dirty="0" err="1">
-                <a:solidFill>
-                  <a:schemeClr val="accent6"/>
-                </a:solidFill>
-              </a:rPr>
-              <a:t>visie</a:t>
-            </a:r>
-            <a:r>
-              <a:rPr lang="en-US" sz="1600" dirty="0">
-                <a:solidFill>
-                  <a:schemeClr val="accent6"/>
-                </a:solidFill>
-              </a:rPr>
-              <a:t> </a:t>
-            </a:r>
-            <a:r>
-              <a:rPr lang="en-US" sz="1600" dirty="0" err="1">
-                <a:solidFill>
-                  <a:schemeClr val="accent6"/>
-                </a:solidFill>
-              </a:rPr>
-              <a:t>onderzoekverslag</a:t>
-            </a:r>
-            <a:endParaRPr lang="en-US" sz="1600" dirty="0">
-              <a:solidFill>
-                <a:schemeClr val="accent6"/>
-              </a:solidFill>
-            </a:endParaRPr>
-          </a:p>
-          <a:p>
-            <a:pPr lvl="1"/>
-            <a:r>
-              <a:rPr lang="en-US" sz="1600" dirty="0">
-                <a:solidFill>
-                  <a:schemeClr val="accent6"/>
-                </a:solidFill>
-              </a:rPr>
-              <a:t>Test-rapport</a:t>
-            </a:r>
-          </a:p>
-          <a:p>
-            <a:pPr lvl="1"/>
-            <a:r>
-              <a:rPr lang="en-US" sz="1600" dirty="0">
-                <a:solidFill>
-                  <a:schemeClr val="accent6"/>
-                </a:solidFill>
-              </a:rPr>
-              <a:t>2D graphic</a:t>
-            </a:r>
           </a:p>
           <a:p>
             <a:pPr lvl="1"/>
@@ -6644,7 +7277,7 @@
         </p:blipFill>
         <p:spPr>
           <a:xfrm>
-            <a:off x="1323796" y="1456474"/>
+            <a:off x="473265" y="1866833"/>
             <a:ext cx="9714319" cy="4614303"/>
           </a:xfrm>
           <a:prstGeom prst="rect">
@@ -6654,10 +7287,10 @@
       </p:pic>
       <p:sp>
         <p:nvSpPr>
-          <p:cNvPr id="10" name="TextBox 9">
+          <p:cNvPr id="2" name="TextBox 1">
             <a:extLst>
               <a:ext uri="{FF2B5EF4-FFF2-40B4-BE49-F238E27FC236}">
-                <a16:creationId xmlns:a16="http://schemas.microsoft.com/office/drawing/2014/main" id="{2C30FE5A-9E86-E597-E856-FED0EE5AC59C}"/>
+                <a16:creationId xmlns:a16="http://schemas.microsoft.com/office/drawing/2014/main" id="{4089F95A-A82F-B85E-F48B-9843ED34B100}"/>
               </a:ext>
             </a:extLst>
           </p:cNvPr>
@@ -6666,8 +7299,8 @@
         </p:nvSpPr>
         <p:spPr>
           <a:xfrm>
-            <a:off x="261257" y="376864"/>
-            <a:ext cx="2917371" cy="584775"/>
+            <a:off x="473265" y="1330294"/>
+            <a:ext cx="3448380" cy="369332"/>
           </a:xfrm>
           <a:prstGeom prst="rect">
             <a:avLst/>
@@ -6675,24 +7308,49 @@
           <a:noFill/>
         </p:spPr>
         <p:txBody>
-          <a:bodyPr wrap="square" rtlCol="0">
+          <a:bodyPr wrap="none" rtlCol="0">
             <a:spAutoFit/>
           </a:bodyPr>
           <a:lstStyle/>
           <a:p>
             <a:r>
-              <a:rPr lang="en-US" sz="3200" dirty="0" err="1"/>
-              <a:t>Bedrijf</a:t>
-            </a:r>
-            <a:r>
-              <a:rPr lang="en-US" sz="3200" dirty="0"/>
-              <a:t> </a:t>
-            </a:r>
-            <a:r>
-              <a:rPr lang="en-US" sz="3200" dirty="0" err="1"/>
-              <a:t>Bezoek</a:t>
-            </a:r>
-            <a:endParaRPr lang="hu-HU" sz="3200" dirty="0"/>
+              <a:rPr lang="en-US" dirty="0"/>
+              <a:t>X Innovation Laboratory RDM</a:t>
+            </a:r>
+          </a:p>
+        </p:txBody>
+      </p:sp>
+      <p:sp>
+        <p:nvSpPr>
+          <p:cNvPr id="3" name="Title 1">
+            <a:extLst>
+              <a:ext uri="{FF2B5EF4-FFF2-40B4-BE49-F238E27FC236}">
+                <a16:creationId xmlns:a16="http://schemas.microsoft.com/office/drawing/2014/main" id="{BB3C879C-6677-3CB5-2505-AA933CC6727B}"/>
+              </a:ext>
+            </a:extLst>
+          </p:cNvPr>
+          <p:cNvSpPr>
+            <a:spLocks noGrp="1"/>
+          </p:cNvSpPr>
+          <p:nvPr>
+            <p:ph type="title"/>
+          </p:nvPr>
+        </p:nvSpPr>
+        <p:spPr>
+          <a:xfrm>
+            <a:off x="2873298" y="406598"/>
+            <a:ext cx="8610600" cy="1293028"/>
+          </a:xfrm>
+        </p:spPr>
+        <p:txBody>
+          <a:bodyPr/>
+          <a:lstStyle/>
+          <a:p>
+            <a:r>
+              <a:rPr lang="en-US" dirty="0" err="1"/>
+              <a:t>Bedrijfsbezoek</a:t>
+            </a:r>
+            <a:endParaRPr lang="en-US" dirty="0"/>
           </a:p>
         </p:txBody>
       </p:sp>
@@ -6717,6 +7375,213 @@
         <p:cNvPr id="1" name="">
           <a:extLst>
             <a:ext uri="{FF2B5EF4-FFF2-40B4-BE49-F238E27FC236}">
+              <a16:creationId xmlns:a16="http://schemas.microsoft.com/office/drawing/2014/main" id="{75EB5835-CCF2-56B2-5FD0-AA5BBB1AD380}"/>
+            </a:ext>
+          </a:extLst>
+        </p:cNvPr>
+        <p:cNvGrpSpPr/>
+        <p:nvPr/>
+      </p:nvGrpSpPr>
+      <p:grpSpPr>
+        <a:xfrm>
+          <a:off x="0" y="0"/>
+          <a:ext cx="0" cy="0"/>
+          <a:chOff x="0" y="0"/>
+          <a:chExt cx="0" cy="0"/>
+        </a:xfrm>
+      </p:grpSpPr>
+      <p:sp>
+        <p:nvSpPr>
+          <p:cNvPr id="2" name="Title 1">
+            <a:extLst>
+              <a:ext uri="{FF2B5EF4-FFF2-40B4-BE49-F238E27FC236}">
+                <a16:creationId xmlns:a16="http://schemas.microsoft.com/office/drawing/2014/main" id="{9AA3B9BF-7CA1-6ED1-F8B2-5C6331D12F3D}"/>
+              </a:ext>
+            </a:extLst>
+          </p:cNvPr>
+          <p:cNvSpPr>
+            <a:spLocks noGrp="1"/>
+          </p:cNvSpPr>
+          <p:nvPr>
+            <p:ph type="title"/>
+          </p:nvPr>
+        </p:nvSpPr>
+        <p:spPr/>
+        <p:txBody>
+          <a:bodyPr/>
+          <a:lstStyle/>
+          <a:p>
+            <a:r>
+              <a:rPr lang="en-US" dirty="0" err="1"/>
+              <a:t>Kalibratie</a:t>
+            </a:r>
+            <a:r>
+              <a:rPr lang="en-US" dirty="0"/>
+              <a:t>/</a:t>
+            </a:r>
+            <a:r>
+              <a:rPr lang="en-US" dirty="0" err="1"/>
+              <a:t>afstandsbepaling</a:t>
+            </a:r>
+            <a:endParaRPr lang="en-US" dirty="0"/>
+          </a:p>
+        </p:txBody>
+      </p:sp>
+      <p:sp>
+        <p:nvSpPr>
+          <p:cNvPr id="3" name="Content Placeholder 2">
+            <a:extLst>
+              <a:ext uri="{FF2B5EF4-FFF2-40B4-BE49-F238E27FC236}">
+                <a16:creationId xmlns:a16="http://schemas.microsoft.com/office/drawing/2014/main" id="{DE8C8864-117E-0BFA-88AB-31AB17D039AF}"/>
+              </a:ext>
+            </a:extLst>
+          </p:cNvPr>
+          <p:cNvSpPr>
+            <a:spLocks noGrp="1"/>
+          </p:cNvSpPr>
+          <p:nvPr>
+            <p:ph idx="1"/>
+          </p:nvPr>
+        </p:nvSpPr>
+        <p:spPr/>
+        <p:txBody>
+          <a:bodyPr>
+            <a:normAutofit/>
+          </a:bodyPr>
+          <a:lstStyle/>
+          <a:p>
+            <a:r>
+              <a:rPr lang="en-US" dirty="0" err="1"/>
+              <a:t>Betere</a:t>
+            </a:r>
+            <a:r>
+              <a:rPr lang="en-US" dirty="0"/>
+              <a:t> </a:t>
+            </a:r>
+            <a:r>
+              <a:rPr lang="en-US" dirty="0" err="1"/>
+              <a:t>kalibratie</a:t>
+            </a:r>
+            <a:endParaRPr lang="en-US" dirty="0"/>
+          </a:p>
+          <a:p>
+            <a:r>
+              <a:rPr lang="en-US" dirty="0"/>
+              <a:t>De </a:t>
+            </a:r>
+            <a:r>
+              <a:rPr lang="en-US" dirty="0" err="1"/>
+              <a:t>waarden</a:t>
+            </a:r>
+            <a:r>
+              <a:rPr lang="en-US" dirty="0"/>
+              <a:t> </a:t>
+            </a:r>
+            <a:r>
+              <a:rPr lang="en-US" dirty="0" err="1"/>
+              <a:t>uit</a:t>
+            </a:r>
+            <a:r>
+              <a:rPr lang="en-US" dirty="0"/>
+              <a:t> </a:t>
+            </a:r>
+            <a:r>
+              <a:rPr lang="en-US" dirty="0" err="1"/>
+              <a:t>kalibratie</a:t>
+            </a:r>
+            <a:r>
+              <a:rPr lang="en-US" dirty="0"/>
+              <a:t> </a:t>
+            </a:r>
+            <a:r>
+              <a:rPr lang="en-US" dirty="0" err="1"/>
+              <a:t>omrekenen</a:t>
+            </a:r>
+            <a:endParaRPr lang="en-US" dirty="0"/>
+          </a:p>
+          <a:p>
+            <a:r>
+              <a:rPr lang="en-US" dirty="0" err="1"/>
+              <a:t>Afstand</a:t>
+            </a:r>
+            <a:r>
+              <a:rPr lang="en-US" dirty="0"/>
+              <a:t> </a:t>
+            </a:r>
+            <a:r>
+              <a:rPr lang="en-US" dirty="0" err="1"/>
+              <a:t>kan</a:t>
+            </a:r>
+            <a:r>
+              <a:rPr lang="en-US" dirty="0"/>
+              <a:t> </a:t>
+            </a:r>
+            <a:r>
+              <a:rPr lang="en-US" dirty="0" err="1"/>
+              <a:t>beter</a:t>
+            </a:r>
+            <a:r>
+              <a:rPr lang="en-US" dirty="0"/>
+              <a:t> </a:t>
+            </a:r>
+            <a:r>
+              <a:rPr lang="en-US" dirty="0" err="1"/>
+              <a:t>bepaald</a:t>
+            </a:r>
+            <a:r>
+              <a:rPr lang="en-US" dirty="0"/>
+              <a:t> </a:t>
+            </a:r>
+            <a:r>
+              <a:rPr lang="en-US" dirty="0" err="1"/>
+              <a:t>worden</a:t>
+            </a:r>
+            <a:endParaRPr lang="en-US" dirty="0"/>
+          </a:p>
+          <a:p>
+            <a:r>
+              <a:rPr lang="en-US" dirty="0" err="1"/>
+              <a:t>Meerdere</a:t>
+            </a:r>
+            <a:r>
+              <a:rPr lang="en-US" dirty="0"/>
+              <a:t> </a:t>
+            </a:r>
+            <a:r>
+              <a:rPr lang="en-US" dirty="0" err="1"/>
+              <a:t>objecten</a:t>
+            </a:r>
+            <a:endParaRPr lang="en-US" dirty="0"/>
+          </a:p>
+          <a:p>
+            <a:endParaRPr lang="en-US" dirty="0"/>
+          </a:p>
+          <a:p>
+            <a:endParaRPr lang="en-US" dirty="0"/>
+          </a:p>
+        </p:txBody>
+      </p:sp>
+    </p:spTree>
+    <p:extLst>
+      <p:ext uri="{BB962C8B-B14F-4D97-AF65-F5344CB8AC3E}">
+        <p14:creationId xmlns:p14="http://schemas.microsoft.com/office/powerpoint/2010/main" val="1169100567"/>
+      </p:ext>
+    </p:extLst>
+  </p:cSld>
+  <p:clrMapOvr>
+    <a:masterClrMapping/>
+  </p:clrMapOvr>
+</p:sld>
+</file>
+
+<file path=ppt/slides/slide6.xml><?xml version="1.0" encoding="utf-8"?>
+<p:sld xmlns:a="http://schemas.openxmlformats.org/drawingml/2006/main" xmlns:r="http://schemas.openxmlformats.org/officeDocument/2006/relationships" xmlns:p="http://schemas.openxmlformats.org/presentationml/2006/main" show="0">
+  <p:cSld>
+    <p:spTree>
+      <p:nvGrpSpPr>
+        <p:cNvPr id="1" name="">
+          <a:extLst>
+            <a:ext uri="{FF2B5EF4-FFF2-40B4-BE49-F238E27FC236}">
               <a16:creationId xmlns:a16="http://schemas.microsoft.com/office/drawing/2014/main" id="{48A3F323-2AF0-0501-8948-D8F945B4B800}"/>
             </a:ext>
           </a:extLst>
@@ -6778,7 +7643,7 @@
 </p:sld>
 </file>
 
-<file path=ppt/slides/slide6.xml><?xml version="1.0" encoding="utf-8"?>
+<file path=ppt/slides/slide7.xml><?xml version="1.0" encoding="utf-8"?>
 <p:sld xmlns:a="http://schemas.openxmlformats.org/drawingml/2006/main" xmlns:r="http://schemas.openxmlformats.org/officeDocument/2006/relationships" xmlns:p="http://schemas.openxmlformats.org/presentationml/2006/main">
   <p:cSld>
     <p:spTree>
@@ -6854,7 +7719,7 @@
           <p:nvPr/>
         </p:nvPicPr>
         <p:blipFill>
-          <a:blip r:embed="rId2"/>
+          <a:blip r:embed="rId3"/>
           <a:stretch>
             <a:fillRect/>
           </a:stretch>
@@ -6882,7 +7747,7 @@
 </p:sld>
 </file>
 
-<file path=ppt/slides/slide7.xml><?xml version="1.0" encoding="utf-8"?>
+<file path=ppt/slides/slide8.xml><?xml version="1.0" encoding="utf-8"?>
 <p:sld xmlns:a="http://schemas.openxmlformats.org/drawingml/2006/main" xmlns:r="http://schemas.openxmlformats.org/officeDocument/2006/relationships" xmlns:p="http://schemas.openxmlformats.org/presentationml/2006/main">
   <p:cSld>
     <p:bg>
@@ -7061,7 +7926,7 @@
             </a:r>
             <a:r>
               <a:rPr lang="en-US" sz="2400" dirty="0" err="1"/>
-              <a:t>onderzoek</a:t>
+              <a:t>verslag</a:t>
             </a:r>
             <a:endParaRPr lang="en-US" sz="2400" dirty="0"/>
           </a:p>
@@ -7080,8 +7945,8 @@
 </p:sld>
 </file>
 
-<file path=ppt/slides/slide8.xml><?xml version="1.0" encoding="utf-8"?>
-<p:sld xmlns:a="http://schemas.openxmlformats.org/drawingml/2006/main" xmlns:r="http://schemas.openxmlformats.org/officeDocument/2006/relationships" xmlns:p="http://schemas.openxmlformats.org/presentationml/2006/main">
+<file path=ppt/slides/slide9.xml><?xml version="1.0" encoding="utf-8"?>
+<p:sld xmlns:a="http://schemas.openxmlformats.org/drawingml/2006/main" xmlns:r="http://schemas.openxmlformats.org/officeDocument/2006/relationships" xmlns:p="http://schemas.openxmlformats.org/presentationml/2006/main" show="0">
   <p:cSld>
     <p:bg>
       <p:bgPr>
@@ -7247,21 +8112,8 @@
             <a:pPr algn="l"/>
             <a:r>
               <a:rPr lang="en-US" sz="2400" dirty="0"/>
-              <a:t>Test rapport </a:t>
-            </a:r>
-            <a:r>
-              <a:rPr lang="en-US" sz="2400" dirty="0" err="1"/>
-              <a:t>ge</a:t>
-            </a:r>
-            <a:r>
-              <a:rPr lang="nl-NL" sz="2400" dirty="0"/>
-              <a:t>u</a:t>
-            </a:r>
-            <a:r>
-              <a:rPr lang="en-US" sz="2400" dirty="0" err="1"/>
-              <a:t>pdatet</a:t>
-            </a:r>
-            <a:endParaRPr lang="en-US" sz="2400" dirty="0"/>
+              <a:t>Test rapport update</a:t>
+            </a:r>
           </a:p>
         </p:txBody>
       </p:sp>
@@ -7269,263 +8121,6 @@
     <p:extLst>
       <p:ext uri="{BB962C8B-B14F-4D97-AF65-F5344CB8AC3E}">
         <p14:creationId xmlns:p14="http://schemas.microsoft.com/office/powerpoint/2010/main" val="827783333"/>
-      </p:ext>
-    </p:extLst>
-  </p:cSld>
-  <p:clrMapOvr>
-    <a:masterClrMapping/>
-  </p:clrMapOvr>
-</p:sld>
-</file>
-
-<file path=ppt/slides/slide9.xml><?xml version="1.0" encoding="utf-8"?>
-<p:sld xmlns:a="http://schemas.openxmlformats.org/drawingml/2006/main" xmlns:r="http://schemas.openxmlformats.org/officeDocument/2006/relationships" xmlns:p="http://schemas.openxmlformats.org/presentationml/2006/main">
-  <p:cSld>
-    <p:bg>
-      <p:bgPr>
-        <a:solidFill>
-          <a:schemeClr val="bg1"/>
-        </a:solidFill>
-        <a:effectLst/>
-      </p:bgPr>
-    </p:bg>
-    <p:spTree>
-      <p:nvGrpSpPr>
-        <p:cNvPr id="1" name=""/>
-        <p:cNvGrpSpPr/>
-        <p:nvPr/>
-      </p:nvGrpSpPr>
-      <p:grpSpPr>
-        <a:xfrm>
-          <a:off x="0" y="0"/>
-          <a:ext cx="0" cy="0"/>
-          <a:chOff x="0" y="0"/>
-          <a:chExt cx="0" cy="0"/>
-        </a:xfrm>
-      </p:grpSpPr>
-      <p:pic>
-        <p:nvPicPr>
-          <p:cNvPr id="18" name="Picture 17">
-            <a:extLst>
-              <a:ext uri="{FF2B5EF4-FFF2-40B4-BE49-F238E27FC236}">
-                <a16:creationId xmlns:a16="http://schemas.microsoft.com/office/drawing/2014/main" id="{BDFADFB3-3D44-49A8-AE3B-A87C61607F7E}"/>
-              </a:ext>
-              <a:ext uri="{C183D7F6-B498-43B3-948B-1728B52AA6E4}">
-                <adec:decorative xmlns:adec="http://schemas.microsoft.com/office/drawing/2017/decorative" val="1"/>
-              </a:ext>
-            </a:extLst>
-          </p:cNvPr>
-          <p:cNvPicPr>
-            <a:picLocks noGrp="1" noRot="1" noChangeAspect="1" noMove="1" noResize="1" noEditPoints="1" noAdjustHandles="1" noChangeArrowheads="1" noChangeShapeType="1" noCrop="1"/>
-          </p:cNvPicPr>
-          <p:nvPr>
-            <p:extLst>
-              <p:ext uri="{386F3935-93C4-4BCD-93E2-E3B085C9AB24}">
-                <p16:designElem xmlns:p16="http://schemas.microsoft.com/office/powerpoint/2015/main" val="1"/>
-              </p:ext>
-            </p:extLst>
-          </p:nvPr>
-        </p:nvPicPr>
-        <p:blipFill>
-          <a:blip r:embed="rId2">
-            <a:extLst>
-              <a:ext uri="{28A0092B-C50C-407E-A947-70E740481C1C}">
-                <a14:useLocalDpi xmlns:a14="http://schemas.microsoft.com/office/drawing/2010/main" val="0"/>
-              </a:ext>
-            </a:extLst>
-          </a:blip>
-          <a:stretch>
-            <a:fillRect/>
-          </a:stretch>
-        </p:blipFill>
-        <p:spPr>
-          <a:xfrm>
-            <a:off x="0" y="0"/>
-            <a:ext cx="12192000" cy="1441450"/>
-          </a:xfrm>
-          <a:prstGeom prst="rect">
-            <a:avLst/>
-          </a:prstGeom>
-        </p:spPr>
-      </p:pic>
-      <p:pic>
-        <p:nvPicPr>
-          <p:cNvPr id="20" name="Picture 19">
-            <a:extLst>
-              <a:ext uri="{FF2B5EF4-FFF2-40B4-BE49-F238E27FC236}">
-                <a16:creationId xmlns:a16="http://schemas.microsoft.com/office/drawing/2014/main" id="{BB912AE0-CAD9-4F8F-A2A2-BDF07D4EDD22}"/>
-              </a:ext>
-              <a:ext uri="{C183D7F6-B498-43B3-948B-1728B52AA6E4}">
-                <adec:decorative xmlns:adec="http://schemas.microsoft.com/office/drawing/2017/decorative" val="1"/>
-              </a:ext>
-            </a:extLst>
-          </p:cNvPr>
-          <p:cNvPicPr>
-            <a:picLocks noGrp="1" noRot="1" noChangeAspect="1" noMove="1" noResize="1" noEditPoints="1" noAdjustHandles="1" noChangeArrowheads="1" noChangeShapeType="1" noCrop="1"/>
-          </p:cNvPicPr>
-          <p:nvPr>
-            <p:extLst>
-              <p:ext uri="{386F3935-93C4-4BCD-93E2-E3B085C9AB24}">
-                <p16:designElem xmlns:p16="http://schemas.microsoft.com/office/powerpoint/2015/main" val="1"/>
-              </p:ext>
-            </p:extLst>
-          </p:nvPr>
-        </p:nvPicPr>
-        <p:blipFill>
-          <a:blip r:embed="rId3">
-            <a:extLst>
-              <a:ext uri="{28A0092B-C50C-407E-A947-70E740481C1C}">
-                <a14:useLocalDpi xmlns:a14="http://schemas.microsoft.com/office/drawing/2010/main" val="0"/>
-              </a:ext>
-            </a:extLst>
-          </a:blip>
-          <a:stretch>
-            <a:fillRect/>
-          </a:stretch>
-        </p:blipFill>
-        <p:spPr>
-          <a:xfrm>
-            <a:off x="0" y="4375150"/>
-            <a:ext cx="12192000" cy="2482850"/>
-          </a:xfrm>
-          <a:prstGeom prst="rect">
-            <a:avLst/>
-          </a:prstGeom>
-        </p:spPr>
-      </p:pic>
-      <p:sp>
-        <p:nvSpPr>
-          <p:cNvPr id="2" name="Title 1">
-            <a:extLst>
-              <a:ext uri="{FF2B5EF4-FFF2-40B4-BE49-F238E27FC236}">
-                <a16:creationId xmlns:a16="http://schemas.microsoft.com/office/drawing/2014/main" id="{B773F3CC-6179-A794-5F67-87B448E20FFB}"/>
-              </a:ext>
-            </a:extLst>
-          </p:cNvPr>
-          <p:cNvSpPr>
-            <a:spLocks noGrp="1"/>
-          </p:cNvSpPr>
-          <p:nvPr>
-            <p:ph type="title"/>
-          </p:nvPr>
-        </p:nvSpPr>
-        <p:spPr>
-          <a:xfrm>
-            <a:off x="685800" y="677194"/>
-            <a:ext cx="10820400" cy="909896"/>
-          </a:xfrm>
-        </p:spPr>
-        <p:txBody>
-          <a:bodyPr vert="horz" lIns="91440" tIns="45720" rIns="91440" bIns="45720" rtlCol="0" anchor="b">
-            <a:normAutofit/>
-          </a:bodyPr>
-          <a:lstStyle/>
-          <a:p>
-            <a:pPr algn="l"/>
-            <a:r>
-              <a:rPr lang="en-US" sz="4400"/>
-              <a:t>Sprint planning 6</a:t>
-            </a:r>
-          </a:p>
-        </p:txBody>
-      </p:sp>
-      <p:sp>
-        <p:nvSpPr>
-          <p:cNvPr id="22" name="Rectangle 21">
-            <a:extLst>
-              <a:ext uri="{FF2B5EF4-FFF2-40B4-BE49-F238E27FC236}">
-                <a16:creationId xmlns:a16="http://schemas.microsoft.com/office/drawing/2014/main" id="{8A0AE57C-30AD-4D4E-9855-B5FBEAD6619D}"/>
-              </a:ext>
-              <a:ext uri="{C183D7F6-B498-43B3-948B-1728B52AA6E4}">
-                <adec:decorative xmlns:adec="http://schemas.microsoft.com/office/drawing/2017/decorative" val="1"/>
-              </a:ext>
-            </a:extLst>
-          </p:cNvPr>
-          <p:cNvSpPr>
-            <a:spLocks noGrp="1" noRot="1" noChangeAspect="1" noMove="1" noResize="1" noEditPoints="1" noAdjustHandles="1" noChangeArrowheads="1" noChangeShapeType="1" noTextEdit="1"/>
-          </p:cNvSpPr>
-          <p:nvPr>
-            <p:extLst>
-              <p:ext uri="{386F3935-93C4-4BCD-93E2-E3B085C9AB24}">
-                <p16:designElem xmlns:p16="http://schemas.microsoft.com/office/powerpoint/2015/main" val="1"/>
-              </p:ext>
-            </p:extLst>
-          </p:nvPr>
-        </p:nvSpPr>
-        <p:spPr bwMode="white">
-          <a:xfrm>
-            <a:off x="0" y="4360126"/>
-            <a:ext cx="12192000" cy="2497873"/>
-          </a:xfrm>
-          <a:prstGeom prst="rect">
-            <a:avLst/>
-          </a:prstGeom>
-          <a:solidFill>
-            <a:schemeClr val="bg1"/>
-          </a:solidFill>
-          <a:ln>
-            <a:noFill/>
-          </a:ln>
-        </p:spPr>
-        <p:style>
-          <a:lnRef idx="2">
-            <a:schemeClr val="accent1">
-              <a:shade val="50000"/>
-            </a:schemeClr>
-          </a:lnRef>
-          <a:fillRef idx="1">
-            <a:schemeClr val="accent1"/>
-          </a:fillRef>
-          <a:effectRef idx="0">
-            <a:schemeClr val="accent1"/>
-          </a:effectRef>
-          <a:fontRef idx="minor">
-            <a:schemeClr val="lt1"/>
-          </a:fontRef>
-        </p:style>
-        <p:txBody>
-          <a:bodyPr rtlCol="0" anchor="ctr"/>
-          <a:lstStyle/>
-          <a:p>
-            <a:pPr algn="ctr"/>
-            <a:endParaRPr lang="en-US"/>
-          </a:p>
-        </p:txBody>
-      </p:sp>
-      <p:pic>
-        <p:nvPicPr>
-          <p:cNvPr id="4" name="Picture 3">
-            <a:extLst>
-              <a:ext uri="{FF2B5EF4-FFF2-40B4-BE49-F238E27FC236}">
-                <a16:creationId xmlns:a16="http://schemas.microsoft.com/office/drawing/2014/main" id="{8E4B9057-2B0C-A8E8-FAA5-07E0AB4A5173}"/>
-              </a:ext>
-            </a:extLst>
-          </p:cNvPr>
-          <p:cNvPicPr>
-            <a:picLocks noChangeAspect="1"/>
-          </p:cNvPicPr>
-          <p:nvPr/>
-        </p:nvPicPr>
-        <p:blipFill>
-          <a:blip r:embed="rId4"/>
-          <a:stretch>
-            <a:fillRect/>
-          </a:stretch>
-        </p:blipFill>
-        <p:spPr>
-          <a:xfrm>
-            <a:off x="768626" y="2422498"/>
-            <a:ext cx="6320592" cy="3602736"/>
-          </a:xfrm>
-          <a:prstGeom prst="rect">
-            <a:avLst/>
-          </a:prstGeom>
-        </p:spPr>
-      </p:pic>
-    </p:spTree>
-    <p:extLst>
-      <p:ext uri="{BB962C8B-B14F-4D97-AF65-F5344CB8AC3E}">
-        <p14:creationId xmlns:p14="http://schemas.microsoft.com/office/powerpoint/2010/main" val="779869938"/>
       </p:ext>
     </p:extLst>
   </p:cSld>
@@ -7803,4 +8398,319 @@
     </a:ext>
   </a:extLst>
 </a:theme>
+</file>
+
+<file path=ppt/theme/theme2.xml><?xml version="1.0" encoding="utf-8"?>
+<a:theme xmlns:a="http://schemas.openxmlformats.org/drawingml/2006/main" name="Office Theme">
+  <a:themeElements>
+    <a:clrScheme name="Office">
+      <a:dk1>
+        <a:sysClr val="windowText" lastClr="000000"/>
+      </a:dk1>
+      <a:lt1>
+        <a:sysClr val="window" lastClr="FFFFFF"/>
+      </a:lt1>
+      <a:dk2>
+        <a:srgbClr val="0E2841"/>
+      </a:dk2>
+      <a:lt2>
+        <a:srgbClr val="E8E8E8"/>
+      </a:lt2>
+      <a:accent1>
+        <a:srgbClr val="156082"/>
+      </a:accent1>
+      <a:accent2>
+        <a:srgbClr val="E97132"/>
+      </a:accent2>
+      <a:accent3>
+        <a:srgbClr val="196B24"/>
+      </a:accent3>
+      <a:accent4>
+        <a:srgbClr val="0F9ED5"/>
+      </a:accent4>
+      <a:accent5>
+        <a:srgbClr val="A02B93"/>
+      </a:accent5>
+      <a:accent6>
+        <a:srgbClr val="4EA72E"/>
+      </a:accent6>
+      <a:hlink>
+        <a:srgbClr val="467886"/>
+      </a:hlink>
+      <a:folHlink>
+        <a:srgbClr val="96607D"/>
+      </a:folHlink>
+    </a:clrScheme>
+    <a:fontScheme name="Office">
+      <a:majorFont>
+        <a:latin typeface="Aptos Display" panose="02110004020202020204"/>
+        <a:ea typeface=""/>
+        <a:cs typeface=""/>
+        <a:font script="Jpan" typeface="游ゴシック Light"/>
+        <a:font script="Hang" typeface="맑은 고딕"/>
+        <a:font script="Hans" typeface="等线 Light"/>
+        <a:font script="Hant" typeface="新細明體"/>
+        <a:font script="Arab" typeface="Times New Roman"/>
+        <a:font script="Hebr" typeface="Times New Roman"/>
+        <a:font script="Thai" typeface="Angsana New"/>
+        <a:font script="Ethi" typeface="Nyala"/>
+        <a:font script="Beng" typeface="Vrinda"/>
+        <a:font script="Gujr" typeface="Shruti"/>
+        <a:font script="Khmr" typeface="MoolBoran"/>
+        <a:font script="Knda" typeface="Tunga"/>
+        <a:font script="Guru" typeface="Raavi"/>
+        <a:font script="Cans" typeface="Euphemia"/>
+        <a:font script="Cher" typeface="Plantagenet Cherokee"/>
+        <a:font script="Yiii" typeface="Microsoft Yi Baiti"/>
+        <a:font script="Tibt" typeface="Microsoft Himalaya"/>
+        <a:font script="Thaa" typeface="MV Boli"/>
+        <a:font script="Deva" typeface="Mangal"/>
+        <a:font script="Telu" typeface="Gautami"/>
+        <a:font script="Taml" typeface="Latha"/>
+        <a:font script="Syrc" typeface="Estrangelo Edessa"/>
+        <a:font script="Orya" typeface="Kalinga"/>
+        <a:font script="Mlym" typeface="Kartika"/>
+        <a:font script="Laoo" typeface="DokChampa"/>
+        <a:font script="Sinh" typeface="Iskoola Pota"/>
+        <a:font script="Mong" typeface="Mongolian Baiti"/>
+        <a:font script="Viet" typeface="Times New Roman"/>
+        <a:font script="Uigh" typeface="Microsoft Uighur"/>
+        <a:font script="Geor" typeface="Sylfaen"/>
+        <a:font script="Armn" typeface="Arial"/>
+        <a:font script="Bugi" typeface="Leelawadee UI"/>
+        <a:font script="Bopo" typeface="Microsoft JhengHei"/>
+        <a:font script="Java" typeface="Javanese Text"/>
+        <a:font script="Lisu" typeface="Segoe UI"/>
+        <a:font script="Mymr" typeface="Myanmar Text"/>
+        <a:font script="Nkoo" typeface="Ebrima"/>
+        <a:font script="Olck" typeface="Nirmala UI"/>
+        <a:font script="Osma" typeface="Ebrima"/>
+        <a:font script="Phag" typeface="Phagspa"/>
+        <a:font script="Syrn" typeface="Estrangelo Edessa"/>
+        <a:font script="Syrj" typeface="Estrangelo Edessa"/>
+        <a:font script="Syre" typeface="Estrangelo Edessa"/>
+        <a:font script="Sora" typeface="Nirmala UI"/>
+        <a:font script="Tale" typeface="Microsoft Tai Le"/>
+        <a:font script="Talu" typeface="Microsoft New Tai Lue"/>
+        <a:font script="Tfng" typeface="Ebrima"/>
+      </a:majorFont>
+      <a:minorFont>
+        <a:latin typeface="Aptos" panose="02110004020202020204"/>
+        <a:ea typeface=""/>
+        <a:cs typeface=""/>
+        <a:font script="Jpan" typeface="游ゴシック"/>
+        <a:font script="Hang" typeface="맑은 고딕"/>
+        <a:font script="Hans" typeface="等线"/>
+        <a:font script="Hant" typeface="新細明體"/>
+        <a:font script="Arab" typeface="Arial"/>
+        <a:font script="Hebr" typeface="Arial"/>
+        <a:font script="Thai" typeface="Cordia New"/>
+        <a:font script="Ethi" typeface="Nyala"/>
+        <a:font script="Beng" typeface="Vrinda"/>
+        <a:font script="Gujr" typeface="Shruti"/>
+        <a:font script="Khmr" typeface="DaunPenh"/>
+        <a:font script="Knda" typeface="Tunga"/>
+        <a:font script="Guru" typeface="Raavi"/>
+        <a:font script="Cans" typeface="Euphemia"/>
+        <a:font script="Cher" typeface="Plantagenet Cherokee"/>
+        <a:font script="Yiii" typeface="Microsoft Yi Baiti"/>
+        <a:font script="Tibt" typeface="Microsoft Himalaya"/>
+        <a:font script="Thaa" typeface="MV Boli"/>
+        <a:font script="Deva" typeface="Mangal"/>
+        <a:font script="Telu" typeface="Gautami"/>
+        <a:font script="Taml" typeface="Latha"/>
+        <a:font script="Syrc" typeface="Estrangelo Edessa"/>
+        <a:font script="Orya" typeface="Kalinga"/>
+        <a:font script="Mlym" typeface="Kartika"/>
+        <a:font script="Laoo" typeface="DokChampa"/>
+        <a:font script="Sinh" typeface="Iskoola Pota"/>
+        <a:font script="Mong" typeface="Mongolian Baiti"/>
+        <a:font script="Viet" typeface="Arial"/>
+        <a:font script="Uigh" typeface="Microsoft Uighur"/>
+        <a:font script="Geor" typeface="Sylfaen"/>
+        <a:font script="Armn" typeface="Arial"/>
+        <a:font script="Bugi" typeface="Leelawadee UI"/>
+        <a:font script="Bopo" typeface="Microsoft JhengHei"/>
+        <a:font script="Java" typeface="Javanese Text"/>
+        <a:font script="Lisu" typeface="Segoe UI"/>
+        <a:font script="Mymr" typeface="Myanmar Text"/>
+        <a:font script="Nkoo" typeface="Ebrima"/>
+        <a:font script="Olck" typeface="Nirmala UI"/>
+        <a:font script="Osma" typeface="Ebrima"/>
+        <a:font script="Phag" typeface="Phagspa"/>
+        <a:font script="Syrn" typeface="Estrangelo Edessa"/>
+        <a:font script="Syrj" typeface="Estrangelo Edessa"/>
+        <a:font script="Syre" typeface="Estrangelo Edessa"/>
+        <a:font script="Sora" typeface="Nirmala UI"/>
+        <a:font script="Tale" typeface="Microsoft Tai Le"/>
+        <a:font script="Talu" typeface="Microsoft New Tai Lue"/>
+        <a:font script="Tfng" typeface="Ebrima"/>
+      </a:minorFont>
+    </a:fontScheme>
+    <a:fmtScheme name="Office">
+      <a:fillStyleLst>
+        <a:solidFill>
+          <a:schemeClr val="phClr"/>
+        </a:solidFill>
+        <a:gradFill rotWithShape="1">
+          <a:gsLst>
+            <a:gs pos="0">
+              <a:schemeClr val="phClr">
+                <a:lumMod val="110000"/>
+                <a:satMod val="105000"/>
+                <a:tint val="67000"/>
+              </a:schemeClr>
+            </a:gs>
+            <a:gs pos="50000">
+              <a:schemeClr val="phClr">
+                <a:lumMod val="105000"/>
+                <a:satMod val="103000"/>
+                <a:tint val="73000"/>
+              </a:schemeClr>
+            </a:gs>
+            <a:gs pos="100000">
+              <a:schemeClr val="phClr">
+                <a:lumMod val="105000"/>
+                <a:satMod val="109000"/>
+                <a:tint val="81000"/>
+              </a:schemeClr>
+            </a:gs>
+          </a:gsLst>
+          <a:lin ang="5400000" scaled="0"/>
+        </a:gradFill>
+        <a:gradFill rotWithShape="1">
+          <a:gsLst>
+            <a:gs pos="0">
+              <a:schemeClr val="phClr">
+                <a:satMod val="103000"/>
+                <a:lumMod val="102000"/>
+                <a:tint val="94000"/>
+              </a:schemeClr>
+            </a:gs>
+            <a:gs pos="50000">
+              <a:schemeClr val="phClr">
+                <a:satMod val="110000"/>
+                <a:lumMod val="100000"/>
+                <a:shade val="100000"/>
+              </a:schemeClr>
+            </a:gs>
+            <a:gs pos="100000">
+              <a:schemeClr val="phClr">
+                <a:lumMod val="99000"/>
+                <a:satMod val="120000"/>
+                <a:shade val="78000"/>
+              </a:schemeClr>
+            </a:gs>
+          </a:gsLst>
+          <a:lin ang="5400000" scaled="0"/>
+        </a:gradFill>
+      </a:fillStyleLst>
+      <a:lnStyleLst>
+        <a:ln w="12700" cap="flat" cmpd="sng" algn="ctr">
+          <a:solidFill>
+            <a:schemeClr val="phClr"/>
+          </a:solidFill>
+          <a:prstDash val="solid"/>
+          <a:miter lim="800000"/>
+        </a:ln>
+        <a:ln w="19050" cap="flat" cmpd="sng" algn="ctr">
+          <a:solidFill>
+            <a:schemeClr val="phClr"/>
+          </a:solidFill>
+          <a:prstDash val="solid"/>
+          <a:miter lim="800000"/>
+        </a:ln>
+        <a:ln w="25400" cap="flat" cmpd="sng" algn="ctr">
+          <a:solidFill>
+            <a:schemeClr val="phClr"/>
+          </a:solidFill>
+          <a:prstDash val="solid"/>
+          <a:miter lim="800000"/>
+        </a:ln>
+      </a:lnStyleLst>
+      <a:effectStyleLst>
+        <a:effectStyle>
+          <a:effectLst/>
+        </a:effectStyle>
+        <a:effectStyle>
+          <a:effectLst/>
+        </a:effectStyle>
+        <a:effectStyle>
+          <a:effectLst>
+            <a:outerShdw blurRad="57150" dist="19050" dir="5400000" algn="ctr" rotWithShape="0">
+              <a:srgbClr val="000000">
+                <a:alpha val="63000"/>
+              </a:srgbClr>
+            </a:outerShdw>
+          </a:effectLst>
+        </a:effectStyle>
+      </a:effectStyleLst>
+      <a:bgFillStyleLst>
+        <a:solidFill>
+          <a:schemeClr val="phClr"/>
+        </a:solidFill>
+        <a:solidFill>
+          <a:schemeClr val="phClr">
+            <a:tint val="95000"/>
+            <a:satMod val="170000"/>
+          </a:schemeClr>
+        </a:solidFill>
+        <a:gradFill rotWithShape="1">
+          <a:gsLst>
+            <a:gs pos="0">
+              <a:schemeClr val="phClr">
+                <a:tint val="93000"/>
+                <a:satMod val="150000"/>
+                <a:shade val="98000"/>
+                <a:lumMod val="102000"/>
+              </a:schemeClr>
+            </a:gs>
+            <a:gs pos="50000">
+              <a:schemeClr val="phClr">
+                <a:tint val="98000"/>
+                <a:satMod val="130000"/>
+                <a:shade val="90000"/>
+                <a:lumMod val="103000"/>
+              </a:schemeClr>
+            </a:gs>
+            <a:gs pos="100000">
+              <a:schemeClr val="phClr">
+                <a:shade val="63000"/>
+                <a:satMod val="120000"/>
+              </a:schemeClr>
+            </a:gs>
+          </a:gsLst>
+          <a:lin ang="5400000" scaled="0"/>
+        </a:gradFill>
+      </a:bgFillStyleLst>
+    </a:fmtScheme>
+  </a:themeElements>
+  <a:objectDefaults>
+    <a:lnDef>
+      <a:spPr/>
+      <a:bodyPr/>
+      <a:lstStyle/>
+      <a:style>
+        <a:lnRef idx="2">
+          <a:schemeClr val="accent1"/>
+        </a:lnRef>
+        <a:fillRef idx="0">
+          <a:schemeClr val="accent1"/>
+        </a:fillRef>
+        <a:effectRef idx="1">
+          <a:schemeClr val="accent1"/>
+        </a:effectRef>
+        <a:fontRef idx="minor">
+          <a:schemeClr val="tx1"/>
+        </a:fontRef>
+      </a:style>
+    </a:lnDef>
+  </a:objectDefaults>
+  <a:extraClrSchemeLst/>
+  <a:extLst>
+    <a:ext uri="{05A4C25C-085E-4340-85A3-A5531E510DB2}">
+      <thm15:themeFamily xmlns:thm15="http://schemas.microsoft.com/office/thememl/2012/main" name="Office Theme" id="{2E142A2C-CD16-42D6-873A-C26D2A0506FA}" vid="{1BDDFF52-6CD6-40A5-AB3C-68EB2F1E4D0A}"/>
+    </a:ext>
+  </a:extLst>
+</a:theme>
 </file>